--- a/curso/pptx/S75.pptx
+++ b/curso/pptx/S75.pptx
@@ -3905,7 +3905,7 @@
                 </a:solidFill>
                 <a:latin typeface="Nunito Sans"/>
               </a:rPr>
-              <a:t>Naiara piensa: «Leire pasa de mí» y se enfada. Una hora después, Leire escribe: «Perdona, me quedé sin batería en el metro».</a:t>
+              <a:t>Una chica piensa: «Mi amiga pasa de mí» y se enfada. Una hora después, la amiga escribe: «Perdona, me quedé sin batería en el metro».</a:t>
             </a:r>
           </a:p>
         </p:txBody>
@@ -3953,7 +3953,7 @@
                 </a:solidFill>
                 <a:latin typeface="Nunito Sans"/>
               </a:rPr>
-              <a:t>¿Qué pasó? Leire leyó el mensaje y no contestó.</a:t>
+              <a:t>¿Qué pasó? La amiga leyó el mensaje y no contestó.</a:t>
             </a:r>
           </a:p>
           <a:p>
@@ -3978,7 +3978,7 @@
                 </a:solidFill>
                 <a:latin typeface="Nunito Sans"/>
               </a:rPr>
-              <a:t>¿Qué idea tuvo Naiara? «Pasa de mí». De esa idea salió el enfado.</a:t>
+              <a:t>¿Qué idea tuvo la chica? «Pasa de mí». De esa idea salió el enfado.</a:t>
             </a:r>
           </a:p>
           <a:p>
@@ -4214,7 +4214,7 @@
                 </a:solidFill>
                 <a:latin typeface="Nunito Sans"/>
               </a:rPr>
-              <a:t>En Aste Nagusia, a Iker se le cae el bocadillo porque Aitor le empuja sin querer. Iker, furioso, le suelta un insulto delante de todos.</a:t>
+              <a:t>En Aste Nagusia, a un chico se le cae el bocadillo porque otro le empuja sin querer. El primero, furioso, le suelta un insulto delante de todos.</a:t>
             </a:r>
           </a:p>
         </p:txBody>
@@ -4523,7 +4523,7 @@
                 </a:solidFill>
                 <a:latin typeface="Nunito Sans"/>
               </a:rPr>
-              <a:t>Kevin empuja a Omar en el patio. Luego explica: «Estaba enfadado. Y en clase dijimos que las emociones no son malas».</a:t>
+              <a:t>Un chico empuja a otro en el patio. Luego explica: «Estaba enfadado. Y en clase dijimos que las emociones no son malas».</a:t>
             </a:r>
           </a:p>
         </p:txBody>
@@ -4571,7 +4571,7 @@
                 </a:solidFill>
                 <a:latin typeface="Nunito Sans"/>
               </a:rPr>
-              <a:t>Si las emociones no son malas, ¿Kevin no ha hecho nada malo?</a:t>
+              <a:t>Si las emociones no son malas, ¿ese chico no ha hecho nada malo?</a:t>
             </a:r>
           </a:p>
           <a:p>
@@ -4596,7 +4596,7 @@
                 </a:solidFill>
                 <a:latin typeface="Nunito Sans"/>
               </a:rPr>
-              <a:t>Parece que Kevin tiene razón: hemos dicho que enfadarse no es malo.</a:t>
+              <a:t>Parece que ese chico tiene razón: hemos dicho que enfadarse no es malo.</a:t>
             </a:r>
           </a:p>
           <a:p>
@@ -4621,7 +4621,7 @@
                 </a:solidFill>
                 <a:latin typeface="Nunito Sans"/>
               </a:rPr>
-              <a:t>Pero Kevin no se ha limitado a sentir: ha empujado. Eso es una conducta.</a:t>
+              <a:t>Pero no se ha limitado a sentir: ha empujado. Eso es una conducta.</a:t>
             </a:r>
           </a:p>
           <a:p>
@@ -4975,7 +4975,7 @@
                 </a:solidFill>
                 <a:latin typeface="Nunito Sans"/>
               </a:rPr>
-              <a:t> «Estoy enfadado». Ponerle nombre ya ayuda a pensar.</a:t>
+              <a:t> «Estoy enfadado».</a:t>
             </a:r>
           </a:p>
           <a:p>
@@ -6150,7 +6150,7 @@
                 </a:solidFill>
                 <a:latin typeface="Nunito Sans"/>
               </a:rPr>
-              <a:t>Para Kohlberg, el nivel moral no se ve en la respuesta, sino en las ______.  (sesión 74)</a:t>
+              <a:t>El nivel moral no se ve en la respuesta, sino en las ______.  (sesión 74)</a:t>
             </a:r>
           </a:p>
           <a:p>
@@ -6352,7 +6352,7 @@
                 </a:solidFill>
                 <a:latin typeface="Nunito Sans"/>
               </a:rPr>
-              <a:t>Para Kohlberg, el nivel moral no se ve en la respuesta, sino en las </a:t>
+              <a:t>El nivel moral no se ve en la respuesta, sino en las </a:t>
             </a:r>
             <a:r>
               <a:rPr sz="2600" b="1">
@@ -6603,7 +6603,7 @@
                 </a:solidFill>
                 <a:latin typeface="Nunito Sans"/>
               </a:rPr>
-              <a:t>Naiara ve que Leire ha leído su mensaje hace una hora y no contesta. Se enfada. Escribe «Pues vale, pasa de mí» y lo envía.</a:t>
+              <a:t>Una chica ve que una amiga ha leído su mensaje hace una hora y no contesta. Se enfada. Escribe «Pues vale, pasa de mí» y lo envía.</a:t>
             </a:r>
           </a:p>
         </p:txBody>
@@ -6642,7 +6642,7 @@
                 </a:solidFill>
                 <a:latin typeface="Nunito Sans"/>
               </a:rPr>
-              <a:t>¿Qué ha sentido Naiara? ¿Tenía razones para sentirlo?</a:t>
+              <a:t>¿Qué ha sentido esa chica? ¿Tenía razones para sentirlo?</a:t>
             </a:r>
           </a:p>
         </p:txBody>

--- a/curso/pptx/S75.pptx
+++ b/curso/pptx/S75.pptx
@@ -22,8 +22,6 @@
     <p:sldId id="270" r:id="rId22"/>
     <p:sldId id="271" r:id="rId23"/>
     <p:sldId id="272" r:id="rId24"/>
-    <p:sldId id="273" r:id="rId25"/>
-    <p:sldId id="274" r:id="rId26"/>
   </p:sldIdLst>
   <p:sldSz cx="12192000" cy="6858000" type="screen4x3"/>
   <p:notesSz cx="6858000" cy="9144000"/>
@@ -3537,7 +3535,7 @@
                 </a:solidFill>
                 <a:latin typeface="Nunito Sans"/>
               </a:rPr>
-              <a:t>PENSAMIENTO CRÍTICO · SESIÓN 75 · UNIDAD 16 · EMOCIONES Y CONFLICTOS</a:t>
+              <a:t>PENSAMIENTO CRÍTICO · SESIÓN 75 · UNIDAD 16 · AMISTAD, AMOR Y FAMILIAS</a:t>
             </a:r>
           </a:p>
         </p:txBody>
@@ -3576,7 +3574,7 @@
                 </a:solidFill>
                 <a:latin typeface="Fredoka"/>
               </a:rPr>
-              <a:t>¿Para qué sirven las emociones?</a:t>
+              <a:t>¿Qué es un amigo?</a:t>
             </a:r>
           </a:p>
         </p:txBody>
@@ -3615,7 +3613,7 @@
                 </a:solidFill>
                 <a:latin typeface="Nunito Sans"/>
               </a:rPr>
-              <a:t>Las emociones no son buenas ni malas: informan de lo que nos importa. Pero pueden equivocarse, y decidir en caliente suele salir mal.</a:t>
+              <a:t>Aristóteles distingue amistades por utilidad, por placer y por virtud; un buen amigo quiere tu bien, aunque a veces eso sea decir que no.</a:t>
             </a:r>
           </a:p>
         </p:txBody>
@@ -3823,7 +3821,7 @@
                 </a:solidFill>
                 <a:latin typeface="Fredoka"/>
               </a:rPr>
-              <a:t>Caso 1 · El mensaje sin contestar</a:t>
+              <a:t>Caso 1 · Tres amistades distintas</a:t>
             </a:r>
           </a:p>
         </p:txBody>
@@ -3905,7 +3903,7 @@
                 </a:solidFill>
                 <a:latin typeface="Nunito Sans"/>
               </a:rPr>
-              <a:t>Una chica piensa: «Mi amiga pasa de mí» y se enfada. Una hora después, la amiga escribe: «Perdona, me quedé sin batería en el metro».</a:t>
+              <a:t>Un chico se sienta con un compañero porque le deja los apuntes. Con otro juega al Fortnite. Con una amiga habla de todo desde primaria. (Ejemplo inventado.)</a:t>
             </a:r>
           </a:p>
         </p:txBody>
@@ -3953,7 +3951,25 @@
                 </a:solidFill>
                 <a:latin typeface="Nunito Sans"/>
               </a:rPr>
-              <a:t>¿Qué pasó? La amiga leyó el mensaje y no contestó.</a:t>
+              <a:t>El primero: le sirve para los apuntes. Amistad por </a:t>
+            </a:r>
+            <a:r>
+              <a:rPr sz="2400" b="1">
+                <a:solidFill>
+                  <a:srgbClr val="1F2A44"/>
+                </a:solidFill>
+                <a:latin typeface="Nunito Sans"/>
+              </a:rPr>
+              <a:t>utilidad</a:t>
+            </a:r>
+            <a:r>
+              <a:rPr sz="2400" b="0">
+                <a:solidFill>
+                  <a:srgbClr val="1F2A44"/>
+                </a:solidFill>
+                <a:latin typeface="Nunito Sans"/>
+              </a:rPr>
+              <a:t>.</a:t>
             </a:r>
           </a:p>
           <a:p>
@@ -3978,7 +3994,25 @@
                 </a:solidFill>
                 <a:latin typeface="Nunito Sans"/>
               </a:rPr>
-              <a:t>¿Qué idea tuvo la chica? «Pasa de mí». De esa idea salió el enfado.</a:t>
+              <a:t>El segundo: lo pasan bien jugando. Amistad por </a:t>
+            </a:r>
+            <a:r>
+              <a:rPr sz="2400" b="1">
+                <a:solidFill>
+                  <a:srgbClr val="1F2A44"/>
+                </a:solidFill>
+                <a:latin typeface="Nunito Sans"/>
+              </a:rPr>
+              <a:t>placer</a:t>
+            </a:r>
+            <a:r>
+              <a:rPr sz="2400" b="0">
+                <a:solidFill>
+                  <a:srgbClr val="1F2A44"/>
+                </a:solidFill>
+                <a:latin typeface="Nunito Sans"/>
+              </a:rPr>
+              <a:t>.</a:t>
             </a:r>
           </a:p>
           <a:p>
@@ -4003,7 +4037,25 @@
                 </a:solidFill>
                 <a:latin typeface="Nunito Sans"/>
               </a:rPr>
-              <a:t>¿Cómo lo sabía? No lo sabía: había otras explicaciones posibles.</a:t>
+              <a:t>La amiga: se quieren por cómo son, desde hace años. Se parece a la amistad por </a:t>
+            </a:r>
+            <a:r>
+              <a:rPr sz="2400" b="1">
+                <a:solidFill>
+                  <a:srgbClr val="1F2A44"/>
+                </a:solidFill>
+                <a:latin typeface="Nunito Sans"/>
+              </a:rPr>
+              <a:t>virtud</a:t>
+            </a:r>
+            <a:r>
+              <a:rPr sz="2400" b="0">
+                <a:solidFill>
+                  <a:srgbClr val="1F2A44"/>
+                </a:solidFill>
+                <a:latin typeface="Nunito Sans"/>
+              </a:rPr>
+              <a:t>.</a:t>
             </a:r>
           </a:p>
           <a:p>
@@ -4028,7 +4080,7 @@
                 </a:solidFill>
                 <a:latin typeface="Nunito Sans"/>
               </a:rPr>
-              <a:t>Conclusión: muchas veces sentimos lo que sentimos por la idea que nos hacemos. Y la idea puede ser falsa.</a:t>
+              <a:t>Conclusión: las tres son amistades. Pero si se acaban los apuntes o el juego, puede acabarse la amistad.</a:t>
             </a:r>
           </a:p>
         </p:txBody>
@@ -4132,7 +4184,7 @@
                 </a:solidFill>
                 <a:latin typeface="Fredoka"/>
               </a:rPr>
-              <a:t>Caso 2 · Decidir en caliente</a:t>
+              <a:t>Caso 2 · La presión del grupo</a:t>
             </a:r>
           </a:p>
         </p:txBody>
@@ -4214,7 +4266,7 @@
                 </a:solidFill>
                 <a:latin typeface="Nunito Sans"/>
               </a:rPr>
-              <a:t>En Aste Nagusia, a un chico se le cae el bocadillo porque otro le empuja sin querer. El primero, furioso, le suelta un insulto delante de todos.</a:t>
+              <a:t>La cuadrilla de una chica se ríe en el grupo de un árbitro que se equivocó. Ella no quiere, pero piensa: «Si no me río, me dejan fuera». (Ejemplo inventado.)</a:t>
             </a:r>
           </a:p>
         </p:txBody>
@@ -4262,7 +4314,25 @@
                 </a:solidFill>
                 <a:latin typeface="Nunito Sans"/>
               </a:rPr>
-              <a:t>¿Era razonable enfadarse? Sí: ha perdido la cena. El enfado informa de algo real.</a:t>
+              <a:t>Es </a:t>
+            </a:r>
+            <a:r>
+              <a:rPr sz="2400" b="1">
+                <a:solidFill>
+                  <a:srgbClr val="1F2A44"/>
+                </a:solidFill>
+                <a:latin typeface="Nunito Sans"/>
+              </a:rPr>
+              <a:t>presión del grupo</a:t>
+            </a:r>
+            <a:r>
+              <a:rPr sz="2400" b="0">
+                <a:solidFill>
+                  <a:srgbClr val="1F2A44"/>
+                </a:solidFill>
+                <a:latin typeface="Nunito Sans"/>
+              </a:rPr>
+              <a:t>: hacer algo para no quedarte fuera, como en el experimento de Asch (sesión 10).</a:t>
             </a:r>
           </a:p>
           <a:p>
@@ -4287,7 +4357,7 @@
                 </a:solidFill>
                 <a:latin typeface="Nunito Sans"/>
               </a:rPr>
-              <a:t>¿Era buena la decisión? No: decidió en caliente, sin mirar si fue sin querer.</a:t>
+              <a:t>Pregunta útil: ¿me quieren a mí, o solo que haga lo que hace el grupo?</a:t>
             </a:r>
           </a:p>
           <a:p>
@@ -4312,7 +4382,25 @@
                 </a:solidFill>
                 <a:latin typeface="Nunito Sans"/>
               </a:rPr>
-              <a:t>En caliente pensamos peor: decidimos rápido y sin razones (sesión 16).</a:t>
+              <a:t>En el experimento de Asch, con un solo </a:t>
+            </a:r>
+            <a:r>
+              <a:rPr sz="2400" b="1">
+                <a:solidFill>
+                  <a:srgbClr val="1F2A44"/>
+                </a:solidFill>
+                <a:latin typeface="Nunito Sans"/>
+              </a:rPr>
+              <a:t>aliado</a:t>
+            </a:r>
+            <a:r>
+              <a:rPr sz="2400" b="0">
+                <a:solidFill>
+                  <a:srgbClr val="1F2A44"/>
+                </a:solidFill>
+                <a:latin typeface="Nunito Sans"/>
+              </a:rPr>
+              <a:t> casi todos resistían. Un «no» ayuda a otros a decirlo.</a:t>
             </a:r>
           </a:p>
           <a:p>
@@ -4337,7 +4425,7 @@
                 </a:solidFill>
                 <a:latin typeface="Nunito Sans"/>
               </a:rPr>
-              <a:t>Conclusión: la emoción puede ser razonable y la decisión, mala. Primero calmarse y esperar, luego decidir.</a:t>
+              <a:t>Conclusión: un amigo de verdad no te pide hacer daño a alguien para seguir siendo tu amigo.</a:t>
             </a:r>
           </a:p>
         </p:txBody>
@@ -4441,7 +4529,7 @@
                 </a:solidFill>
                 <a:latin typeface="Fredoka"/>
               </a:rPr>
-              <a:t>⚠ «Las emociones no son malas»</a:t>
+              <a:t>⚠ «Si eres mi amigo, me cubres»</a:t>
             </a:r>
           </a:p>
         </p:txBody>
@@ -4523,7 +4611,7 @@
                 </a:solidFill>
                 <a:latin typeface="Nunito Sans"/>
               </a:rPr>
-              <a:t>Un chico empuja a otro en el patio. Luego explica: «Estaba enfadado. Y en clase dijimos que las emociones no son malas».</a:t>
+              <a:t>Un chico quiere que un amigo le diga a su madre que ayer estudiaron juntos. En realidad, se fue al Casco Viejo. «Si eres mi amigo, me cubres». (Ejemplo inventado.)</a:t>
             </a:r>
           </a:p>
         </p:txBody>
@@ -4571,7 +4659,7 @@
                 </a:solidFill>
                 <a:latin typeface="Nunito Sans"/>
               </a:rPr>
-              <a:t>Si las emociones no son malas, ¿ese chico no ha hecho nada malo?</a:t>
+              <a:t>Si el amigo dice que no, ¿es un mal amigo?</a:t>
             </a:r>
           </a:p>
           <a:p>
@@ -4596,7 +4684,7 @@
                 </a:solidFill>
                 <a:latin typeface="Nunito Sans"/>
               </a:rPr>
-              <a:t>Parece que ese chico tiene razón: hemos dicho que enfadarse no es malo.</a:t>
+              <a:t>Parece que sí: un amigo te apoya y te cubre.</a:t>
             </a:r>
           </a:p>
           <a:p>
@@ -4621,7 +4709,25 @@
                 </a:solidFill>
                 <a:latin typeface="Nunito Sans"/>
               </a:rPr>
-              <a:t>Pero no se ha limitado a sentir: ha empujado. Eso es una conducta.</a:t>
+              <a:t>Pero en la amistad por virtud quiero el </a:t>
+            </a:r>
+            <a:r>
+              <a:rPr sz="2400" b="1">
+                <a:solidFill>
+                  <a:srgbClr val="1F2A44"/>
+                </a:solidFill>
+                <a:latin typeface="Nunito Sans"/>
+              </a:rPr>
+              <a:t>bien</a:t>
+            </a:r>
+            <a:r>
+              <a:rPr sz="2400" b="0">
+                <a:solidFill>
+                  <a:srgbClr val="1F2A44"/>
+                </a:solidFill>
+                <a:latin typeface="Nunito Sans"/>
+              </a:rPr>
+              <a:t> del otro, no darle todo lo que pide.</a:t>
             </a:r>
           </a:p>
           <a:p>
@@ -4646,7 +4752,7 @@
                 </a:solidFill>
                 <a:latin typeface="Nunito Sans"/>
               </a:rPr>
-              <a:t>Las emociones no se eligen; lo que hacemos con ellas, sí.</a:t>
+              <a:t>Mentir por él puede meterle en líos mayores. Aristóteles añade que los buenos amigos no se piden cosas malas.</a:t>
             </a:r>
           </a:p>
           <a:p>
@@ -4671,7 +4777,7 @@
                 </a:solidFill>
                 <a:latin typeface="Nunito Sans"/>
               </a:rPr>
-              <a:t>Conclusión: el enfado no es malo, pero empujar sí puede serlo. Sentir y hacer son cosas distintas.</a:t>
+              <a:t>Conclusión: decir «no» a algo que no está bien también puede ser cuidar al amigo.</a:t>
             </a:r>
           </a:p>
         </p:txBody>
@@ -4690,7 +4796,7 @@
     <p:bg>
       <p:bgPr>
         <a:solidFill>
-          <a:srgbClr val="1F2A44"/>
+          <a:srgbClr val="FBF7EF"/>
         </a:solidFill>
         <a:effectLst/>
       </p:bgPr>
@@ -4710,8 +4816,8 @@
         </p:nvSpPr>
         <p:spPr>
           <a:xfrm>
-            <a:off x="640000" y="2300000"/>
-            <a:ext cx="10912000" cy="500000"/>
+            <a:off x="640000" y="380000"/>
+            <a:ext cx="10912000" cy="420000"/>
           </a:xfrm>
           <a:prstGeom prst="rect">
             <a:avLst/>
@@ -4726,17 +4832,17 @@
           <a:p>
             <a:pPr>
               <a:spcAft>
-                <a:spcPts val="810"/>
+                <a:spcPts val="630"/>
               </a:spcAft>
             </a:pPr>
             <a:r>
-              <a:rPr sz="1800" b="1">
-                <a:solidFill>
-                  <a:srgbClr val="F4B183"/>
-                </a:solidFill>
-                <a:latin typeface="Nunito Sans"/>
-              </a:rPr>
-              <a:t>BLOQUE 3</a:t>
+              <a:rPr sz="1400" b="1">
+                <a:solidFill>
+                  <a:srgbClr val="E8793A"/>
+                </a:solidFill>
+                <a:latin typeface="Nunito Sans"/>
+              </a:rPr>
+              <a:t>LO DE HOY EN TRES LÍNEAS</a:t>
             </a:r>
           </a:p>
         </p:txBody>
@@ -4749,7 +4855,7 @@
         </p:nvSpPr>
         <p:spPr>
           <a:xfrm>
-            <a:off x="640000" y="2800000"/>
+            <a:off x="640000" y="760000"/>
             <a:ext cx="10912000" cy="800000"/>
           </a:xfrm>
           <a:prstGeom prst="rect">
@@ -4765,17 +4871,56 @@
           <a:p>
             <a:pPr>
               <a:spcAft>
-                <a:spcPts val="2160"/>
+                <a:spcPts val="1710"/>
               </a:spcAft>
             </a:pPr>
             <a:r>
-              <a:rPr sz="4800" b="1">
-                <a:solidFill>
-                  <a:srgbClr val="FBF7EF"/>
+              <a:rPr sz="3800" b="1">
+                <a:solidFill>
+                  <a:srgbClr val="1F2A44"/>
                 </a:solidFill>
                 <a:latin typeface="Fredoka"/>
               </a:rPr>
-              <a:t>Antes de decidir en caliente</a:t>
+              <a:t>Escríbelo tú primero, sin mirar</a:t>
+            </a:r>
+          </a:p>
+        </p:txBody>
+      </p:sp>
+      <p:sp>
+        <p:nvSpPr>
+          <p:cNvPr id="4" name="TextBox 3"/>
+          <p:cNvSpPr txBox="1"/>
+          <p:nvPr/>
+        </p:nvSpPr>
+        <p:spPr>
+          <a:xfrm>
+            <a:off x="640000" y="1800000"/>
+            <a:ext cx="10912000" cy="1500000"/>
+          </a:xfrm>
+          <a:prstGeom prst="rect">
+            <a:avLst/>
+          </a:prstGeom>
+          <a:noFill/>
+        </p:spPr>
+        <p:txBody>
+          <a:bodyPr wrap="square">
+            <a:spAutoFit/>
+          </a:bodyPr>
+          <a:lstStyle/>
+          <a:p>
+            <a:pPr>
+              <a:spcAft>
+                <a:spcPts val="1170"/>
+              </a:spcAft>
+            </a:pPr>
+            <a:r>
+              <a:rPr sz="2600" b="0">
+                <a:solidFill>
+                  <a:srgbClr val="4A5568"/>
+                </a:solidFill>
+                <a:latin typeface="Nunito Sans"/>
+              </a:rPr>
+              <a:t>Dos minutos. Después lo comparamos.</a:t>
             </a:r>
           </a:p>
         </p:txBody>
@@ -4840,7 +4985,7 @@
                 </a:solidFill>
                 <a:latin typeface="Nunito Sans"/>
               </a:rPr>
-              <a:t>BLOQUE 3 · ANTES DE DECIDIR EN CALIENTE</a:t>
+              <a:t>LO DE HOY EN TRES LÍNEAS</a:t>
             </a:r>
           </a:p>
         </p:txBody>
@@ -4853,8 +4998,8 @@
         </p:nvSpPr>
         <p:spPr>
           <a:xfrm>
-            <a:off x="640000" y="760000"/>
-            <a:ext cx="10912000" cy="800000"/>
+            <a:off x="640000" y="1300000"/>
+            <a:ext cx="10912000" cy="4800000"/>
           </a:xfrm>
           <a:prstGeom prst="rect">
             <a:avLst/>
@@ -4869,181 +5014,76 @@
           <a:p>
             <a:pPr>
               <a:spcAft>
-                <a:spcPts val="1710"/>
+                <a:spcPts val="1350"/>
               </a:spcAft>
             </a:pPr>
             <a:r>
-              <a:rPr sz="3800" b="1">
+              <a:rPr sz="3000" b="1">
+                <a:solidFill>
+                  <a:srgbClr val="E8793A"/>
+                </a:solidFill>
+                <a:latin typeface="Nunito Sans"/>
+              </a:rPr>
+              <a:t>1. </a:t>
+            </a:r>
+            <a:r>
+              <a:rPr sz="3000" b="0">
                 <a:solidFill>
                   <a:srgbClr val="1F2A44"/>
                 </a:solidFill>
-                <a:latin typeface="Fredoka"/>
-              </a:rPr>
-              <a:t>Tres pasos cuando la emoción es fuerte</a:t>
-            </a:r>
-          </a:p>
-        </p:txBody>
-      </p:sp>
-      <p:sp>
-        <p:nvSpPr>
-          <p:cNvPr id="4" name="TextBox 3"/>
-          <p:cNvSpPr txBox="1"/>
-          <p:nvPr/>
-        </p:nvSpPr>
-        <p:spPr>
-          <a:xfrm>
-            <a:off x="840000" y="1730000"/>
-            <a:ext cx="10512000" cy="1000000"/>
-          </a:xfrm>
-          <a:prstGeom prst="rect">
-            <a:avLst/>
-          </a:prstGeom>
-          <a:noFill/>
-        </p:spPr>
-        <p:txBody>
-          <a:bodyPr wrap="square" anchor="ctr">
-            <a:spAutoFit/>
-          </a:bodyPr>
-          <a:lstStyle/>
+                <a:latin typeface="Nunito Sans"/>
+              </a:rPr>
+              <a:t>Para Aristóteles, la amistad es quererse bien de forma mutua y saberlo.</a:t>
+            </a:r>
+          </a:p>
           <a:p>
             <a:pPr>
               <a:spcAft>
-                <a:spcPts val="1080"/>
+                <a:spcPts val="1350"/>
               </a:spcAft>
             </a:pPr>
             <a:r>
-              <a:rPr sz="2400" b="0">
+              <a:rPr sz="3000" b="1">
+                <a:solidFill>
+                  <a:srgbClr val="E8793A"/>
+                </a:solidFill>
+                <a:latin typeface="Nunito Sans"/>
+              </a:rPr>
+              <a:t>2. </a:t>
+            </a:r>
+            <a:r>
+              <a:rPr sz="3000" b="0">
                 <a:solidFill>
                   <a:srgbClr val="1F2A44"/>
                 </a:solidFill>
                 <a:latin typeface="Nunito Sans"/>
               </a:rPr>
-              <a:t>Como vimos en la sesión 16, quien asusta quiere que decidas rápido.</a:t>
-            </a:r>
-          </a:p>
-        </p:txBody>
-      </p:sp>
-      <p:sp>
-        <p:nvSpPr>
-          <p:cNvPr id="5" name="TextBox 4"/>
-          <p:cNvSpPr txBox="1"/>
-          <p:nvPr/>
-        </p:nvSpPr>
-        <p:spPr>
-          <a:xfrm>
-            <a:off x="640000" y="3000000"/>
-            <a:ext cx="10912000" cy="3458000"/>
-          </a:xfrm>
-          <a:prstGeom prst="rect">
-            <a:avLst/>
-          </a:prstGeom>
-          <a:noFill/>
-        </p:spPr>
-        <p:txBody>
-          <a:bodyPr wrap="square">
-            <a:spAutoFit/>
-          </a:bodyPr>
-          <a:lstStyle/>
+              <a:t>Hay amistad por utilidad, por placer y por virtud, que quiere a la persona misma.</a:t>
+            </a:r>
+          </a:p>
           <a:p>
             <a:pPr>
               <a:spcAft>
-                <a:spcPts val="1260"/>
+                <a:spcPts val="1350"/>
               </a:spcAft>
             </a:pPr>
             <a:r>
-              <a:rPr sz="2800" b="1">
+              <a:rPr sz="3000" b="1">
                 <a:solidFill>
                   <a:srgbClr val="E8793A"/>
                 </a:solidFill>
                 <a:latin typeface="Nunito Sans"/>
               </a:rPr>
-              <a:t>• </a:t>
-            </a:r>
-            <a:r>
-              <a:rPr sz="2800" b="1">
+              <a:t>3. </a:t>
+            </a:r>
+            <a:r>
+              <a:rPr sz="3000" b="0">
                 <a:solidFill>
                   <a:srgbClr val="1F2A44"/>
                 </a:solidFill>
                 <a:latin typeface="Nunito Sans"/>
               </a:rPr>
-              <a:t>Nombrar:</a:t>
-            </a:r>
-            <a:r>
-              <a:rPr sz="2800" b="0">
-                <a:solidFill>
-                  <a:srgbClr val="1F2A44"/>
-                </a:solidFill>
-                <a:latin typeface="Nunito Sans"/>
-              </a:rPr>
-              <a:t> «Estoy enfadado».</a:t>
-            </a:r>
-          </a:p>
-          <a:p>
-            <a:pPr>
-              <a:spcAft>
-                <a:spcPts val="1260"/>
-              </a:spcAft>
-            </a:pPr>
-            <a:r>
-              <a:rPr sz="2800" b="1">
-                <a:solidFill>
-                  <a:srgbClr val="E8793A"/>
-                </a:solidFill>
-                <a:latin typeface="Nunito Sans"/>
-              </a:rPr>
-              <a:t>• </a:t>
-            </a:r>
-            <a:r>
-              <a:rPr sz="2800" b="1">
-                <a:solidFill>
-                  <a:srgbClr val="1F2A44"/>
-                </a:solidFill>
-                <a:latin typeface="Nunito Sans"/>
-              </a:rPr>
-              <a:t>Esperar:</a:t>
-            </a:r>
-            <a:r>
-              <a:rPr sz="2800" b="0">
-                <a:solidFill>
-                  <a:srgbClr val="1F2A44"/>
-                </a:solidFill>
-                <a:latin typeface="Nunito Sans"/>
-              </a:rPr>
-              <a:t> no enviar, no contestar, no decidir todavía.</a:t>
-            </a:r>
-          </a:p>
-          <a:p>
-            <a:pPr>
-              <a:spcAft>
-                <a:spcPts val="1260"/>
-              </a:spcAft>
-            </a:pPr>
-            <a:r>
-              <a:rPr sz="2800" b="1">
-                <a:solidFill>
-                  <a:srgbClr val="E8793A"/>
-                </a:solidFill>
-                <a:latin typeface="Nunito Sans"/>
-              </a:rPr>
-              <a:t>• </a:t>
-            </a:r>
-            <a:r>
-              <a:rPr sz="2800" b="1">
-                <a:solidFill>
-                  <a:srgbClr val="1F2A44"/>
-                </a:solidFill>
-                <a:latin typeface="Nunito Sans"/>
-              </a:rPr>
-              <a:t>Preguntar:</a:t>
-            </a:r>
-            <a:r>
-              <a:rPr sz="2800" b="0">
-                <a:solidFill>
-                  <a:srgbClr val="1F2A44"/>
-                </a:solidFill>
-                <a:latin typeface="Nunito Sans"/>
-              </a:rPr>
-              <a:t> ¿qué idea me hago? ¿Cómo lo sé? ¿Hay otra explicación?</a:t>
+              <a:t>Un buen amigo quiere tu bien: a veces eso significa decir que no.</a:t>
             </a:r>
           </a:p>
         </p:txBody>
@@ -5057,312 +5097,6 @@
 </file>
 
 <file path=ppt/slides/slide16.xml><?xml version="1.0" encoding="utf-8"?>
-<p:sld xmlns:a="http://schemas.openxmlformats.org/drawingml/2006/main" xmlns:p="http://schemas.openxmlformats.org/presentationml/2006/main" xmlns:r="http://schemas.openxmlformats.org/officeDocument/2006/relationships">
-  <p:cSld>
-    <p:bg>
-      <p:bgPr>
-        <a:solidFill>
-          <a:srgbClr val="FBF7EF"/>
-        </a:solidFill>
-        <a:effectLst/>
-      </p:bgPr>
-    </p:bg>
-    <p:spTree>
-      <p:nvGrpSpPr>
-        <p:cNvPr id="1" name=""/>
-        <p:cNvGrpSpPr/>
-        <p:nvPr/>
-      </p:nvGrpSpPr>
-      <p:grpSpPr/>
-      <p:sp>
-        <p:nvSpPr>
-          <p:cNvPr id="2" name="TextBox 1"/>
-          <p:cNvSpPr txBox="1"/>
-          <p:nvPr/>
-        </p:nvSpPr>
-        <p:spPr>
-          <a:xfrm>
-            <a:off x="640000" y="380000"/>
-            <a:ext cx="10912000" cy="420000"/>
-          </a:xfrm>
-          <a:prstGeom prst="rect">
-            <a:avLst/>
-          </a:prstGeom>
-          <a:noFill/>
-        </p:spPr>
-        <p:txBody>
-          <a:bodyPr wrap="square">
-            <a:spAutoFit/>
-          </a:bodyPr>
-          <a:lstStyle/>
-          <a:p>
-            <a:pPr>
-              <a:spcAft>
-                <a:spcPts val="630"/>
-              </a:spcAft>
-            </a:pPr>
-            <a:r>
-              <a:rPr sz="1400" b="1">
-                <a:solidFill>
-                  <a:srgbClr val="E8793A"/>
-                </a:solidFill>
-                <a:latin typeface="Nunito Sans"/>
-              </a:rPr>
-              <a:t>LO DE HOY EN TRES LÍNEAS</a:t>
-            </a:r>
-          </a:p>
-        </p:txBody>
-      </p:sp>
-      <p:sp>
-        <p:nvSpPr>
-          <p:cNvPr id="3" name="TextBox 2"/>
-          <p:cNvSpPr txBox="1"/>
-          <p:nvPr/>
-        </p:nvSpPr>
-        <p:spPr>
-          <a:xfrm>
-            <a:off x="640000" y="760000"/>
-            <a:ext cx="10912000" cy="800000"/>
-          </a:xfrm>
-          <a:prstGeom prst="rect">
-            <a:avLst/>
-          </a:prstGeom>
-          <a:noFill/>
-        </p:spPr>
-        <p:txBody>
-          <a:bodyPr wrap="square">
-            <a:spAutoFit/>
-          </a:bodyPr>
-          <a:lstStyle/>
-          <a:p>
-            <a:pPr>
-              <a:spcAft>
-                <a:spcPts val="1710"/>
-              </a:spcAft>
-            </a:pPr>
-            <a:r>
-              <a:rPr sz="3800" b="1">
-                <a:solidFill>
-                  <a:srgbClr val="1F2A44"/>
-                </a:solidFill>
-                <a:latin typeface="Fredoka"/>
-              </a:rPr>
-              <a:t>Escríbelo tú primero, sin mirar</a:t>
-            </a:r>
-          </a:p>
-        </p:txBody>
-      </p:sp>
-      <p:sp>
-        <p:nvSpPr>
-          <p:cNvPr id="4" name="TextBox 3"/>
-          <p:cNvSpPr txBox="1"/>
-          <p:nvPr/>
-        </p:nvSpPr>
-        <p:spPr>
-          <a:xfrm>
-            <a:off x="640000" y="1800000"/>
-            <a:ext cx="10912000" cy="1500000"/>
-          </a:xfrm>
-          <a:prstGeom prst="rect">
-            <a:avLst/>
-          </a:prstGeom>
-          <a:noFill/>
-        </p:spPr>
-        <p:txBody>
-          <a:bodyPr wrap="square">
-            <a:spAutoFit/>
-          </a:bodyPr>
-          <a:lstStyle/>
-          <a:p>
-            <a:pPr>
-              <a:spcAft>
-                <a:spcPts val="1170"/>
-              </a:spcAft>
-            </a:pPr>
-            <a:r>
-              <a:rPr sz="2600" b="0">
-                <a:solidFill>
-                  <a:srgbClr val="4A5568"/>
-                </a:solidFill>
-                <a:latin typeface="Nunito Sans"/>
-              </a:rPr>
-              <a:t>Dos minutos. Después lo comparamos.</a:t>
-            </a:r>
-          </a:p>
-        </p:txBody>
-      </p:sp>
-    </p:spTree>
-  </p:cSld>
-  <p:clrMapOvr>
-    <a:masterClrMapping/>
-  </p:clrMapOvr>
-</p:sld>
-</file>
-
-<file path=ppt/slides/slide17.xml><?xml version="1.0" encoding="utf-8"?>
-<p:sld xmlns:a="http://schemas.openxmlformats.org/drawingml/2006/main" xmlns:p="http://schemas.openxmlformats.org/presentationml/2006/main" xmlns:r="http://schemas.openxmlformats.org/officeDocument/2006/relationships">
-  <p:cSld>
-    <p:bg>
-      <p:bgPr>
-        <a:solidFill>
-          <a:srgbClr val="FBF7EF"/>
-        </a:solidFill>
-        <a:effectLst/>
-      </p:bgPr>
-    </p:bg>
-    <p:spTree>
-      <p:nvGrpSpPr>
-        <p:cNvPr id="1" name=""/>
-        <p:cNvGrpSpPr/>
-        <p:nvPr/>
-      </p:nvGrpSpPr>
-      <p:grpSpPr/>
-      <p:sp>
-        <p:nvSpPr>
-          <p:cNvPr id="2" name="TextBox 1"/>
-          <p:cNvSpPr txBox="1"/>
-          <p:nvPr/>
-        </p:nvSpPr>
-        <p:spPr>
-          <a:xfrm>
-            <a:off x="640000" y="380000"/>
-            <a:ext cx="10912000" cy="420000"/>
-          </a:xfrm>
-          <a:prstGeom prst="rect">
-            <a:avLst/>
-          </a:prstGeom>
-          <a:noFill/>
-        </p:spPr>
-        <p:txBody>
-          <a:bodyPr wrap="square">
-            <a:spAutoFit/>
-          </a:bodyPr>
-          <a:lstStyle/>
-          <a:p>
-            <a:pPr>
-              <a:spcAft>
-                <a:spcPts val="630"/>
-              </a:spcAft>
-            </a:pPr>
-            <a:r>
-              <a:rPr sz="1400" b="1">
-                <a:solidFill>
-                  <a:srgbClr val="E8793A"/>
-                </a:solidFill>
-                <a:latin typeface="Nunito Sans"/>
-              </a:rPr>
-              <a:t>LO DE HOY EN TRES LÍNEAS</a:t>
-            </a:r>
-          </a:p>
-        </p:txBody>
-      </p:sp>
-      <p:sp>
-        <p:nvSpPr>
-          <p:cNvPr id="3" name="TextBox 2"/>
-          <p:cNvSpPr txBox="1"/>
-          <p:nvPr/>
-        </p:nvSpPr>
-        <p:spPr>
-          <a:xfrm>
-            <a:off x="640000" y="1300000"/>
-            <a:ext cx="10912000" cy="4800000"/>
-          </a:xfrm>
-          <a:prstGeom prst="rect">
-            <a:avLst/>
-          </a:prstGeom>
-          <a:noFill/>
-        </p:spPr>
-        <p:txBody>
-          <a:bodyPr wrap="square">
-            <a:spAutoFit/>
-          </a:bodyPr>
-          <a:lstStyle/>
-          <a:p>
-            <a:pPr>
-              <a:spcAft>
-                <a:spcPts val="1350"/>
-              </a:spcAft>
-            </a:pPr>
-            <a:r>
-              <a:rPr sz="3000" b="1">
-                <a:solidFill>
-                  <a:srgbClr val="E8793A"/>
-                </a:solidFill>
-                <a:latin typeface="Nunito Sans"/>
-              </a:rPr>
-              <a:t>1. </a:t>
-            </a:r>
-            <a:r>
-              <a:rPr sz="3000" b="0">
-                <a:solidFill>
-                  <a:srgbClr val="1F2A44"/>
-                </a:solidFill>
-                <a:latin typeface="Nunito Sans"/>
-              </a:rPr>
-              <a:t>Una emoción es una reacción rápida ante algo que nos importa; un sentimiento dura más.</a:t>
-            </a:r>
-          </a:p>
-          <a:p>
-            <a:pPr>
-              <a:spcAft>
-                <a:spcPts val="1350"/>
-              </a:spcAft>
-            </a:pPr>
-            <a:r>
-              <a:rPr sz="3000" b="1">
-                <a:solidFill>
-                  <a:srgbClr val="E8793A"/>
-                </a:solidFill>
-                <a:latin typeface="Nunito Sans"/>
-              </a:rPr>
-              <a:t>2. </a:t>
-            </a:r>
-            <a:r>
-              <a:rPr sz="3000" b="0">
-                <a:solidFill>
-                  <a:srgbClr val="1F2A44"/>
-                </a:solidFill>
-                <a:latin typeface="Nunito Sans"/>
-              </a:rPr>
-              <a:t>Las emociones no son buenas ni malas: informan, pero pueden equivocarse.</a:t>
-            </a:r>
-          </a:p>
-          <a:p>
-            <a:pPr>
-              <a:spcAft>
-                <a:spcPts val="1350"/>
-              </a:spcAft>
-            </a:pPr>
-            <a:r>
-              <a:rPr sz="3000" b="1">
-                <a:solidFill>
-                  <a:srgbClr val="E8793A"/>
-                </a:solidFill>
-                <a:latin typeface="Nunito Sans"/>
-              </a:rPr>
-              <a:t>3. </a:t>
-            </a:r>
-            <a:r>
-              <a:rPr sz="3000" b="0">
-                <a:solidFill>
-                  <a:srgbClr val="1F2A44"/>
-                </a:solidFill>
-                <a:latin typeface="Nunito Sans"/>
-              </a:rPr>
-              <a:t>La emoción no se elige; lo que hacemos con ella, sí. En caliente, mejor esperar.</a:t>
-            </a:r>
-          </a:p>
-        </p:txBody>
-      </p:sp>
-    </p:spTree>
-  </p:cSld>
-  <p:clrMapOvr>
-    <a:masterClrMapping/>
-  </p:clrMapOvr>
-</p:sld>
-</file>
-
-<file path=ppt/slides/slide18.xml><?xml version="1.0" encoding="utf-8"?>
 <p:sld xmlns:a="http://schemas.openxmlformats.org/drawingml/2006/main" xmlns:p="http://schemas.openxmlformats.org/presentationml/2006/main" xmlns:r="http://schemas.openxmlformats.org/officeDocument/2006/relationships">
   <p:cSld>
     <p:bg>
@@ -5453,7 +5187,7 @@
                 </a:solidFill>
                 <a:latin typeface="Fredoka"/>
               </a:rPr>
-              <a:t>Para qué sirven las emociones básicas (miedo, enfado, tristeza, alegría)</a:t>
+              <a:t>Los tres tipos de amistad según Aristóteles</a:t>
             </a:r>
           </a:p>
         </p:txBody>
@@ -5492,7 +5226,7 @@
                 </a:solidFill>
                 <a:latin typeface="Nunito Sans"/>
               </a:rPr>
-              <a:t>Que vean con otros ejemplos que cada emoción es un aviso útil, no un fallo.</a:t>
+              <a:t>Ver con otros ejemplos la diferencia entre amistad por utilidad, por placer y por virtud.</a:t>
             </a:r>
           </a:p>
         </p:txBody>
@@ -5505,7 +5239,7 @@
 </p:sld>
 </file>
 
-<file path=ppt/slides/slide19.xml><?xml version="1.0" encoding="utf-8"?>
+<file path=ppt/slides/slide17.xml><?xml version="1.0" encoding="utf-8"?>
 <p:sld xmlns:a="http://schemas.openxmlformats.org/drawingml/2006/main" xmlns:p="http://schemas.openxmlformats.org/presentationml/2006/main" xmlns:r="http://schemas.openxmlformats.org/officeDocument/2006/relationships">
   <p:cSld>
     <p:bg>
@@ -6603,7 +6337,7 @@
                 </a:solidFill>
                 <a:latin typeface="Nunito Sans"/>
               </a:rPr>
-              <a:t>Una chica ve que una amiga ha leído su mensaje hace una hora y no contesta. Se enfada. Escribe «Pues vale, pasa de mí» y lo envía.</a:t>
+              <a:t>Un chico tiene 600 seguidores en Instagram y un grupo de WhatsApp con 30 personas de la cuadrilla.</a:t>
             </a:r>
           </a:p>
         </p:txBody>
@@ -6642,7 +6376,7 @@
                 </a:solidFill>
                 <a:latin typeface="Nunito Sans"/>
               </a:rPr>
-              <a:t>¿Qué ha sentido esa chica? ¿Tenía razones para sentirlo?</a:t>
+              <a:t>¿Cuántos de ellos son amigos de verdad? ¿Cómo lo sabes?</a:t>
             </a:r>
           </a:p>
         </p:txBody>
@@ -6746,7 +6480,7 @@
                 </a:solidFill>
                 <a:latin typeface="Fredoka"/>
               </a:rPr>
-              <a:t>Emoción, sentimiento e idea</a:t>
+              <a:t>Tres tipos de amistad</a:t>
             </a:r>
           </a:p>
         </p:txBody>
@@ -6811,7 +6545,7 @@
                 </a:solidFill>
                 <a:latin typeface="Nunito Sans"/>
               </a:rPr>
-              <a:t>BLOQUE 1 · EMOCIÓN, SENTIMIENTO E IDEA</a:t>
+              <a:t>BLOQUE 1 · TRES TIPOS DE AMISTAD</a:t>
             </a:r>
           </a:p>
         </p:txBody>
@@ -6824,8 +6558,8 @@
         </p:nvSpPr>
         <p:spPr>
           <a:xfrm>
-            <a:off x="640000" y="760000"/>
-            <a:ext cx="10912000" cy="800000"/>
+            <a:off x="640000" y="1500000"/>
+            <a:ext cx="10912000" cy="3000000"/>
           </a:xfrm>
           <a:prstGeom prst="rect">
             <a:avLst/>
@@ -6840,74 +6574,31 @@
           <a:p>
             <a:pPr>
               <a:spcAft>
-                <a:spcPts val="1710"/>
+                <a:spcPts val="1530"/>
               </a:spcAft>
             </a:pPr>
             <a:r>
-              <a:rPr sz="3800" b="1">
+              <a:rPr sz="3400" b="1">
                 <a:solidFill>
                   <a:srgbClr val="1F2A44"/>
                 </a:solidFill>
-                <a:latin typeface="Fredoka"/>
-              </a:rPr>
-              <a:t>Emoción</a:t>
-            </a:r>
-          </a:p>
-        </p:txBody>
-      </p:sp>
-      <p:sp>
-        <p:nvSpPr>
-          <p:cNvPr id="4" name="Rectangle 3"/>
-          <p:cNvSpPr/>
-          <p:nvPr/>
-        </p:nvSpPr>
-        <p:spPr>
-          <a:xfrm>
-            <a:off x="640000" y="1650000"/>
-            <a:ext cx="10912000" cy="1150000"/>
-          </a:xfrm>
-          <a:prstGeom prst="rect">
-            <a:avLst/>
-          </a:prstGeom>
-          <a:solidFill>
-            <a:srgbClr val="EAF0F7"/>
-          </a:solidFill>
-          <a:ln>
-            <a:noFill/>
-          </a:ln>
-        </p:spPr>
-        <p:style>
-          <a:lnRef idx="1">
-            <a:schemeClr val="accent1"/>
-          </a:lnRef>
-          <a:fillRef idx="3">
-            <a:schemeClr val="accent1"/>
-          </a:fillRef>
-          <a:effectRef idx="2">
-            <a:schemeClr val="accent1"/>
-          </a:effectRef>
-          <a:fontRef idx="minor">
-            <a:schemeClr val="lt1"/>
-          </a:fontRef>
-        </p:style>
-        <p:txBody>
-          <a:bodyPr rtlCol="0" anchor="ctr"/>
-          <a:lstStyle/>
-          <a:p>
-            <a:pPr algn="ctr"/>
-          </a:p>
-        </p:txBody>
-      </p:sp>
-      <p:sp>
-        <p:nvSpPr>
-          <p:cNvPr id="5" name="TextBox 4"/>
+                <a:latin typeface="Nunito Sans"/>
+              </a:rPr>
+              <a:t>Sin amigos nadie querría vivir, aunque tuviera todos los demás bienes.</a:t>
+            </a:r>
+          </a:p>
+        </p:txBody>
+      </p:sp>
+      <p:sp>
+        <p:nvSpPr>
+          <p:cNvPr id="4" name="TextBox 3"/>
           <p:cNvSpPr txBox="1"/>
           <p:nvPr/>
         </p:nvSpPr>
         <p:spPr>
           <a:xfrm>
-            <a:off x="840000" y="1730000"/>
-            <a:ext cx="10512000" cy="1000000"/>
+            <a:off x="640000" y="4700000"/>
+            <a:ext cx="10912000" cy="600000"/>
           </a:xfrm>
           <a:prstGeom prst="rect">
             <a:avLst/>
@@ -6915,45 +6606,6 @@
           <a:noFill/>
         </p:spPr>
         <p:txBody>
-          <a:bodyPr wrap="square" anchor="ctr">
-            <a:spAutoFit/>
-          </a:bodyPr>
-          <a:lstStyle/>
-          <a:p>
-            <a:pPr>
-              <a:spcAft>
-                <a:spcPts val="1260"/>
-              </a:spcAft>
-            </a:pPr>
-            <a:r>
-              <a:rPr sz="2800" b="1">
-                <a:solidFill>
-                  <a:srgbClr val="1F2A44"/>
-                </a:solidFill>
-                <a:latin typeface="Nunito Sans"/>
-              </a:rPr>
-              <a:t>Es una reacción rápida del cuerpo y de la mente ante algo que nos importa.</a:t>
-            </a:r>
-          </a:p>
-        </p:txBody>
-      </p:sp>
-      <p:sp>
-        <p:nvSpPr>
-          <p:cNvPr id="6" name="TextBox 5"/>
-          <p:cNvSpPr txBox="1"/>
-          <p:nvPr/>
-        </p:nvSpPr>
-        <p:spPr>
-          <a:xfrm>
-            <a:off x="640000" y="3000000"/>
-            <a:ext cx="10912000" cy="3458000"/>
-          </a:xfrm>
-          <a:prstGeom prst="rect">
-            <a:avLst/>
-          </a:prstGeom>
-          <a:noFill/>
-        </p:spPr>
-        <p:txBody>
           <a:bodyPr wrap="square">
             <a:spAutoFit/>
           </a:bodyPr>
@@ -6961,130 +6613,17 @@
           <a:p>
             <a:pPr>
               <a:spcAft>
-                <a:spcPts val="1260"/>
+                <a:spcPts val="990"/>
               </a:spcAft>
             </a:pPr>
             <a:r>
-              <a:rPr sz="2800" b="1">
-                <a:solidFill>
-                  <a:srgbClr val="E8793A"/>
-                </a:solidFill>
-                <a:latin typeface="Nunito Sans"/>
-              </a:rPr>
-              <a:t>• </a:t>
-            </a:r>
-            <a:r>
-              <a:rPr sz="2800" b="0">
-                <a:solidFill>
-                  <a:srgbClr val="1F2A44"/>
-                </a:solidFill>
-                <a:latin typeface="Nunito Sans"/>
-              </a:rPr>
-              <a:t>Aparece </a:t>
-            </a:r>
-            <a:r>
-              <a:rPr sz="2800" b="1">
-                <a:solidFill>
-                  <a:srgbClr val="1F2A44"/>
-                </a:solidFill>
-                <a:latin typeface="Nunito Sans"/>
-              </a:rPr>
-              <a:t>sola</a:t>
-            </a:r>
-            <a:r>
-              <a:rPr sz="2800" b="0">
-                <a:solidFill>
-                  <a:srgbClr val="1F2A44"/>
-                </a:solidFill>
-                <a:latin typeface="Nunito Sans"/>
-              </a:rPr>
-              <a:t>: no la elegimos</a:t>
-            </a:r>
-          </a:p>
-          <a:p>
-            <a:pPr>
-              <a:spcAft>
-                <a:spcPts val="1260"/>
-              </a:spcAft>
-            </a:pPr>
-            <a:r>
-              <a:rPr sz="2800" b="1">
-                <a:solidFill>
-                  <a:srgbClr val="E8793A"/>
-                </a:solidFill>
-                <a:latin typeface="Nunito Sans"/>
-              </a:rPr>
-              <a:t>• </a:t>
-            </a:r>
-            <a:r>
-              <a:rPr sz="2800" b="0">
-                <a:solidFill>
-                  <a:srgbClr val="1F2A44"/>
-                </a:solidFill>
-                <a:latin typeface="Nunito Sans"/>
-              </a:rPr>
-              <a:t>Dura </a:t>
-            </a:r>
-            <a:r>
-              <a:rPr sz="2800" b="1">
-                <a:solidFill>
-                  <a:srgbClr val="1F2A44"/>
-                </a:solidFill>
-                <a:latin typeface="Nunito Sans"/>
-              </a:rPr>
-              <a:t>poco</a:t>
-            </a:r>
-            <a:r>
-              <a:rPr sz="2800" b="0">
-                <a:solidFill>
-                  <a:srgbClr val="1F2A44"/>
-                </a:solidFill>
-                <a:latin typeface="Nunito Sans"/>
-              </a:rPr>
-              <a:t>: segundos o minutos</a:t>
-            </a:r>
-          </a:p>
-          <a:p>
-            <a:pPr>
-              <a:spcAft>
-                <a:spcPts val="1260"/>
-              </a:spcAft>
-            </a:pPr>
-            <a:r>
-              <a:rPr sz="2800" b="1">
-                <a:solidFill>
-                  <a:srgbClr val="E8793A"/>
-                </a:solidFill>
-                <a:latin typeface="Nunito Sans"/>
-              </a:rPr>
-              <a:t>• </a:t>
-            </a:r>
-            <a:r>
-              <a:rPr sz="2800" b="0">
-                <a:solidFill>
-                  <a:srgbClr val="1F2A44"/>
-                </a:solidFill>
-                <a:latin typeface="Nunito Sans"/>
-              </a:rPr>
-              <a:t>Se nota en el </a:t>
-            </a:r>
-            <a:r>
-              <a:rPr sz="2800" b="1">
-                <a:solidFill>
-                  <a:srgbClr val="1F2A44"/>
-                </a:solidFill>
-                <a:latin typeface="Nunito Sans"/>
-              </a:rPr>
-              <a:t>cuerpo</a:t>
-            </a:r>
-            <a:r>
-              <a:rPr sz="2800" b="0">
-                <a:solidFill>
-                  <a:srgbClr val="1F2A44"/>
-                </a:solidFill>
-                <a:latin typeface="Nunito Sans"/>
-              </a:rPr>
-              <a:t>: corazón, cara, estómago</a:t>
+              <a:rPr sz="2200" b="0">
+                <a:solidFill>
+                  <a:srgbClr val="4A5568"/>
+                </a:solidFill>
+                <a:latin typeface="Nunito Sans"/>
+              </a:rPr>
+              <a:t>Aristóteles, «Ética a Nicómaco», libro VIII (siglo IV a. C.)</a:t>
             </a:r>
           </a:p>
         </p:txBody>
@@ -7149,7 +6688,7 @@
                 </a:solidFill>
                 <a:latin typeface="Nunito Sans"/>
               </a:rPr>
-              <a:t>BLOQUE 1 · EMOCIÓN, SENTIMIENTO E IDEA</a:t>
+              <a:t>BLOQUE 1 · TRES TIPOS DE AMISTAD</a:t>
             </a:r>
           </a:p>
         </p:txBody>
@@ -7188,7 +6727,345 @@
                 </a:solidFill>
                 <a:latin typeface="Fredoka"/>
               </a:rPr>
-              <a:t>Tres cosas que solemos mezclar</a:t>
+              <a:t>Amistad</a:t>
+            </a:r>
+          </a:p>
+        </p:txBody>
+      </p:sp>
+      <p:sp>
+        <p:nvSpPr>
+          <p:cNvPr id="4" name="Rectangle 3"/>
+          <p:cNvSpPr/>
+          <p:nvPr/>
+        </p:nvSpPr>
+        <p:spPr>
+          <a:xfrm>
+            <a:off x="640000" y="1650000"/>
+            <a:ext cx="10912000" cy="1150000"/>
+          </a:xfrm>
+          <a:prstGeom prst="rect">
+            <a:avLst/>
+          </a:prstGeom>
+          <a:solidFill>
+            <a:srgbClr val="EAF0F7"/>
+          </a:solidFill>
+          <a:ln>
+            <a:noFill/>
+          </a:ln>
+        </p:spPr>
+        <p:style>
+          <a:lnRef idx="1">
+            <a:schemeClr val="accent1"/>
+          </a:lnRef>
+          <a:fillRef idx="3">
+            <a:schemeClr val="accent1"/>
+          </a:fillRef>
+          <a:effectRef idx="2">
+            <a:schemeClr val="accent1"/>
+          </a:effectRef>
+          <a:fontRef idx="minor">
+            <a:schemeClr val="lt1"/>
+          </a:fontRef>
+        </p:style>
+        <p:txBody>
+          <a:bodyPr rtlCol="0" anchor="ctr"/>
+          <a:lstStyle/>
+          <a:p>
+            <a:pPr algn="ctr"/>
+          </a:p>
+        </p:txBody>
+      </p:sp>
+      <p:sp>
+        <p:nvSpPr>
+          <p:cNvPr id="5" name="TextBox 4"/>
+          <p:cNvSpPr txBox="1"/>
+          <p:nvPr/>
+        </p:nvSpPr>
+        <p:spPr>
+          <a:xfrm>
+            <a:off x="840000" y="1730000"/>
+            <a:ext cx="10512000" cy="1000000"/>
+          </a:xfrm>
+          <a:prstGeom prst="rect">
+            <a:avLst/>
+          </a:prstGeom>
+          <a:noFill/>
+        </p:spPr>
+        <p:txBody>
+          <a:bodyPr wrap="square" anchor="ctr">
+            <a:spAutoFit/>
+          </a:bodyPr>
+          <a:lstStyle/>
+          <a:p>
+            <a:pPr>
+              <a:spcAft>
+                <a:spcPts val="1260"/>
+              </a:spcAft>
+            </a:pPr>
+            <a:r>
+              <a:rPr sz="2800" b="1">
+                <a:solidFill>
+                  <a:srgbClr val="1F2A44"/>
+                </a:solidFill>
+                <a:latin typeface="Nunito Sans"/>
+              </a:rPr>
+              <a:t>Para Aristóteles, la </a:t>
+            </a:r>
+            <a:r>
+              <a:rPr sz="2800" b="1">
+                <a:solidFill>
+                  <a:srgbClr val="1F2A44"/>
+                </a:solidFill>
+                <a:latin typeface="Nunito Sans"/>
+              </a:rPr>
+              <a:t>amistad</a:t>
+            </a:r>
+            <a:r>
+              <a:rPr sz="2800" b="1">
+                <a:solidFill>
+                  <a:srgbClr val="1F2A44"/>
+                </a:solidFill>
+                <a:latin typeface="Nunito Sans"/>
+              </a:rPr>
+              <a:t> es quererse bien de forma mutua y saberlo: cada uno desea el bien del otro.</a:t>
+            </a:r>
+          </a:p>
+        </p:txBody>
+      </p:sp>
+      <p:sp>
+        <p:nvSpPr>
+          <p:cNvPr id="6" name="TextBox 5"/>
+          <p:cNvSpPr txBox="1"/>
+          <p:nvPr/>
+        </p:nvSpPr>
+        <p:spPr>
+          <a:xfrm>
+            <a:off x="640000" y="3000000"/>
+            <a:ext cx="10912000" cy="3458000"/>
+          </a:xfrm>
+          <a:prstGeom prst="rect">
+            <a:avLst/>
+          </a:prstGeom>
+          <a:noFill/>
+        </p:spPr>
+        <p:txBody>
+          <a:bodyPr wrap="square">
+            <a:spAutoFit/>
+          </a:bodyPr>
+          <a:lstStyle/>
+          <a:p>
+            <a:pPr>
+              <a:spcAft>
+                <a:spcPts val="1260"/>
+              </a:spcAft>
+            </a:pPr>
+            <a:r>
+              <a:rPr sz="2800" b="1">
+                <a:solidFill>
+                  <a:srgbClr val="E8793A"/>
+                </a:solidFill>
+                <a:latin typeface="Nunito Sans"/>
+              </a:rPr>
+              <a:t>• </a:t>
+            </a:r>
+            <a:r>
+              <a:rPr sz="2800" b="0">
+                <a:solidFill>
+                  <a:srgbClr val="1F2A44"/>
+                </a:solidFill>
+                <a:latin typeface="Nunito Sans"/>
+              </a:rPr>
+              <a:t>Es </a:t>
+            </a:r>
+            <a:r>
+              <a:rPr sz="2800" b="1">
+                <a:solidFill>
+                  <a:srgbClr val="1F2A44"/>
+                </a:solidFill>
+                <a:latin typeface="Nunito Sans"/>
+              </a:rPr>
+              <a:t>mutua</a:t>
+            </a:r>
+            <a:r>
+              <a:rPr sz="2800" b="0">
+                <a:solidFill>
+                  <a:srgbClr val="1F2A44"/>
+                </a:solidFill>
+                <a:latin typeface="Nunito Sans"/>
+              </a:rPr>
+              <a:t>: si solo quiere uno, no es amistad</a:t>
+            </a:r>
+          </a:p>
+          <a:p>
+            <a:pPr>
+              <a:spcAft>
+                <a:spcPts val="1260"/>
+              </a:spcAft>
+            </a:pPr>
+            <a:r>
+              <a:rPr sz="2800" b="1">
+                <a:solidFill>
+                  <a:srgbClr val="E8793A"/>
+                </a:solidFill>
+                <a:latin typeface="Nunito Sans"/>
+              </a:rPr>
+              <a:t>• </a:t>
+            </a:r>
+            <a:r>
+              <a:rPr sz="2800" b="0">
+                <a:solidFill>
+                  <a:srgbClr val="1F2A44"/>
+                </a:solidFill>
+                <a:latin typeface="Nunito Sans"/>
+              </a:rPr>
+              <a:t>Los dos lo </a:t>
+            </a:r>
+            <a:r>
+              <a:rPr sz="2800" b="1">
+                <a:solidFill>
+                  <a:srgbClr val="1F2A44"/>
+                </a:solidFill>
+                <a:latin typeface="Nunito Sans"/>
+              </a:rPr>
+              <a:t>saben</a:t>
+            </a:r>
+            <a:r>
+              <a:rPr sz="2800" b="0">
+                <a:solidFill>
+                  <a:srgbClr val="1F2A44"/>
+                </a:solidFill>
+                <a:latin typeface="Nunito Sans"/>
+              </a:rPr>
+              <a:t>: no es un cariño escondido</a:t>
+            </a:r>
+          </a:p>
+          <a:p>
+            <a:pPr>
+              <a:spcAft>
+                <a:spcPts val="1260"/>
+              </a:spcAft>
+            </a:pPr>
+            <a:r>
+              <a:rPr sz="2800" b="1">
+                <a:solidFill>
+                  <a:srgbClr val="E8793A"/>
+                </a:solidFill>
+                <a:latin typeface="Nunito Sans"/>
+              </a:rPr>
+              <a:t>• </a:t>
+            </a:r>
+            <a:r>
+              <a:rPr sz="2800" b="0">
+                <a:solidFill>
+                  <a:srgbClr val="1F2A44"/>
+                </a:solidFill>
+                <a:latin typeface="Nunito Sans"/>
+              </a:rPr>
+              <a:t>Aristóteles fue un filósofo griego, alumno de Platón</a:t>
+            </a:r>
+          </a:p>
+        </p:txBody>
+      </p:sp>
+    </p:spTree>
+  </p:cSld>
+  <p:clrMapOvr>
+    <a:masterClrMapping/>
+  </p:clrMapOvr>
+</p:sld>
+</file>
+
+<file path=ppt/slides/slide8.xml><?xml version="1.0" encoding="utf-8"?>
+<p:sld xmlns:a="http://schemas.openxmlformats.org/drawingml/2006/main" xmlns:p="http://schemas.openxmlformats.org/presentationml/2006/main" xmlns:r="http://schemas.openxmlformats.org/officeDocument/2006/relationships">
+  <p:cSld>
+    <p:bg>
+      <p:bgPr>
+        <a:solidFill>
+          <a:srgbClr val="FBF7EF"/>
+        </a:solidFill>
+        <a:effectLst/>
+      </p:bgPr>
+    </p:bg>
+    <p:spTree>
+      <p:nvGrpSpPr>
+        <p:cNvPr id="1" name=""/>
+        <p:cNvGrpSpPr/>
+        <p:nvPr/>
+      </p:nvGrpSpPr>
+      <p:grpSpPr/>
+      <p:sp>
+        <p:nvSpPr>
+          <p:cNvPr id="2" name="TextBox 1"/>
+          <p:cNvSpPr txBox="1"/>
+          <p:nvPr/>
+        </p:nvSpPr>
+        <p:spPr>
+          <a:xfrm>
+            <a:off x="640000" y="380000"/>
+            <a:ext cx="10912000" cy="420000"/>
+          </a:xfrm>
+          <a:prstGeom prst="rect">
+            <a:avLst/>
+          </a:prstGeom>
+          <a:noFill/>
+        </p:spPr>
+        <p:txBody>
+          <a:bodyPr wrap="square">
+            <a:spAutoFit/>
+          </a:bodyPr>
+          <a:lstStyle/>
+          <a:p>
+            <a:pPr>
+              <a:spcAft>
+                <a:spcPts val="630"/>
+              </a:spcAft>
+            </a:pPr>
+            <a:r>
+              <a:rPr sz="1400" b="1">
+                <a:solidFill>
+                  <a:srgbClr val="E8793A"/>
+                </a:solidFill>
+                <a:latin typeface="Nunito Sans"/>
+              </a:rPr>
+              <a:t>BLOQUE 1 · TRES TIPOS DE AMISTAD</a:t>
+            </a:r>
+          </a:p>
+        </p:txBody>
+      </p:sp>
+      <p:sp>
+        <p:nvSpPr>
+          <p:cNvPr id="3" name="TextBox 2"/>
+          <p:cNvSpPr txBox="1"/>
+          <p:nvPr/>
+        </p:nvSpPr>
+        <p:spPr>
+          <a:xfrm>
+            <a:off x="640000" y="760000"/>
+            <a:ext cx="10912000" cy="800000"/>
+          </a:xfrm>
+          <a:prstGeom prst="rect">
+            <a:avLst/>
+          </a:prstGeom>
+          <a:noFill/>
+        </p:spPr>
+        <p:txBody>
+          <a:bodyPr wrap="square">
+            <a:spAutoFit/>
+          </a:bodyPr>
+          <a:lstStyle/>
+          <a:p>
+            <a:pPr>
+              <a:spcAft>
+                <a:spcPts val="1710"/>
+              </a:spcAft>
+            </a:pPr>
+            <a:r>
+              <a:rPr sz="3800" b="1">
+                <a:solidFill>
+                  <a:srgbClr val="1F2A44"/>
+                </a:solidFill>
+                <a:latin typeface="Fredoka"/>
+              </a:rPr>
+              <a:t>Los tres tipos de amistad (Aristóteles)</a:t>
             </a:r>
           </a:p>
         </p:txBody>
@@ -7229,7 +7106,7 @@
                           </a:solidFill>
                           <a:latin typeface="Fredoka"/>
                         </a:rPr>
-                        <a:t/>
+                        <a:t>Tipo</a:t>
                       </a:r>
                     </a:p>
                   </a:txBody>
@@ -7251,7 +7128,7 @@
                           </a:solidFill>
                           <a:latin typeface="Fredoka"/>
                         </a:rPr>
-                        <a:t>Qué es</a:t>
+                        <a:t>Qué quiero del otro</a:t>
                       </a:r>
                     </a:p>
                   </a:txBody>
@@ -7273,7 +7150,7 @@
                           </a:solidFill>
                           <a:latin typeface="Fredoka"/>
                         </a:rPr>
-                        <a:t>Ejemplo: la nota de Mates</a:t>
+                        <a:t>¿Cuánto dura?</a:t>
                       </a:r>
                     </a:p>
                   </a:txBody>
@@ -7291,13 +7168,22 @@
                     <a:lstStyle/>
                     <a:p>
                       <a:r>
+                        <a:rPr sz="2000" b="0">
+                          <a:solidFill>
+                            <a:srgbClr val="1F2A44"/>
+                          </a:solidFill>
+                          <a:latin typeface="Nunito Sans"/>
+                        </a:rPr>
+                        <a:t>Por </a:t>
+                      </a:r>
+                      <a:r>
                         <a:rPr sz="2000" b="1">
                           <a:solidFill>
                             <a:srgbClr val="1F2A44"/>
                           </a:solidFill>
                           <a:latin typeface="Nunito Sans"/>
                         </a:rPr>
-                        <a:t>Emoción</a:t>
+                        <a:t>utilidad</a:t>
                       </a:r>
                     </a:p>
                   </a:txBody>
@@ -7319,7 +7205,7 @@
                           </a:solidFill>
                           <a:latin typeface="Nunito Sans"/>
                         </a:rPr>
-                        <a:t>Reacción rápida que dura poco</a:t>
+                        <a:t>Que me sirva: me ayuda, me presta, me conviene</a:t>
                       </a:r>
                     </a:p>
                   </a:txBody>
@@ -7341,7 +7227,7 @@
                           </a:solidFill>
                           <a:latin typeface="Nunito Sans"/>
                         </a:rPr>
-                        <a:t>Se me encoge el estómago al ver un 3</a:t>
+                        <a:t>Se acaba cuando deja de servir</a:t>
                       </a:r>
                     </a:p>
                   </a:txBody>
@@ -7359,13 +7245,22 @@
                     <a:lstStyle/>
                     <a:p>
                       <a:r>
+                        <a:rPr sz="2000" b="0">
+                          <a:solidFill>
+                            <a:srgbClr val="1F2A44"/>
+                          </a:solidFill>
+                          <a:latin typeface="Nunito Sans"/>
+                        </a:rPr>
+                        <a:t>Por </a:t>
+                      </a:r>
+                      <a:r>
                         <a:rPr sz="2000" b="1">
                           <a:solidFill>
                             <a:srgbClr val="1F2A44"/>
                           </a:solidFill>
                           <a:latin typeface="Nunito Sans"/>
                         </a:rPr>
-                        <a:t>Sentimiento</a:t>
+                        <a:t>placer</a:t>
                       </a:r>
                     </a:p>
                   </a:txBody>
@@ -7387,7 +7282,7 @@
                           </a:solidFill>
                           <a:latin typeface="Nunito Sans"/>
                         </a:rPr>
-                        <a:t>Emoción que dura y en la que pienso</a:t>
+                        <a:t>Pasarlo bien: es divertido, compartimos aficiones</a:t>
                       </a:r>
                     </a:p>
                   </a:txBody>
@@ -7409,7 +7304,7 @@
                           </a:solidFill>
                           <a:latin typeface="Nunito Sans"/>
                         </a:rPr>
-                        <a:t>Llevo toda la semana preocupada</a:t>
+                        <a:t>Se acaba cuando deja de divertir</a:t>
                       </a:r>
                     </a:p>
                   </a:txBody>
@@ -7427,13 +7322,31 @@
                     <a:lstStyle/>
                     <a:p>
                       <a:r>
+                        <a:rPr sz="2000" b="0">
+                          <a:solidFill>
+                            <a:srgbClr val="1F2A44"/>
+                          </a:solidFill>
+                          <a:latin typeface="Nunito Sans"/>
+                        </a:rPr>
+                        <a:t>Por </a:t>
+                      </a:r>
+                      <a:r>
                         <a:rPr sz="2000" b="1">
                           <a:solidFill>
                             <a:srgbClr val="1F2A44"/>
                           </a:solidFill>
                           <a:latin typeface="Nunito Sans"/>
                         </a:rPr>
-                        <a:t>Idea</a:t>
+                        <a:t>virtud</a:t>
+                      </a:r>
+                      <a:r>
+                        <a:rPr sz="2000" b="0">
+                          <a:solidFill>
+                            <a:srgbClr val="1F2A44"/>
+                          </a:solidFill>
+                          <a:latin typeface="Nunito Sans"/>
+                        </a:rPr>
+                        <a:t> (por la persona misma)</a:t>
                       </a:r>
                     </a:p>
                   </a:txBody>
@@ -7455,7 +7368,7 @@
                           </a:solidFill>
                           <a:latin typeface="Nunito Sans"/>
                         </a:rPr>
-                        <a:t>Lo que pienso de lo que pasa</a:t>
+                        <a:t>A la persona: quiero su bien por ella misma</a:t>
                       </a:r>
                     </a:p>
                   </a:txBody>
@@ -7477,484 +7390,13 @@
                           </a:solidFill>
                           <a:latin typeface="Nunito Sans"/>
                         </a:rPr>
-                        <a:t>«Voy a suspender el curso entero»</a:t>
+                        <a:t>Dura mucho, pero es rara</a:t>
                       </a:r>
                     </a:p>
                   </a:txBody>
                   <a:tcPr>
                     <a:solidFill>
                       <a:srgbClr val="FFFFFF"/>
-                    </a:solidFill>
-                  </a:tcPr>
-                </a:tc>
-              </a:tr>
-            </a:tbl>
-          </a:graphicData>
-        </a:graphic>
-      </p:graphicFrame>
-    </p:spTree>
-  </p:cSld>
-  <p:clrMapOvr>
-    <a:masterClrMapping/>
-  </p:clrMapOvr>
-</p:sld>
-</file>
-
-<file path=ppt/slides/slide8.xml><?xml version="1.0" encoding="utf-8"?>
-<p:sld xmlns:a="http://schemas.openxmlformats.org/drawingml/2006/main" xmlns:p="http://schemas.openxmlformats.org/presentationml/2006/main" xmlns:r="http://schemas.openxmlformats.org/officeDocument/2006/relationships">
-  <p:cSld>
-    <p:bg>
-      <p:bgPr>
-        <a:solidFill>
-          <a:srgbClr val="FBF7EF"/>
-        </a:solidFill>
-        <a:effectLst/>
-      </p:bgPr>
-    </p:bg>
-    <p:spTree>
-      <p:nvGrpSpPr>
-        <p:cNvPr id="1" name=""/>
-        <p:cNvGrpSpPr/>
-        <p:nvPr/>
-      </p:nvGrpSpPr>
-      <p:grpSpPr/>
-      <p:sp>
-        <p:nvSpPr>
-          <p:cNvPr id="2" name="TextBox 1"/>
-          <p:cNvSpPr txBox="1"/>
-          <p:nvPr/>
-        </p:nvSpPr>
-        <p:spPr>
-          <a:xfrm>
-            <a:off x="640000" y="380000"/>
-            <a:ext cx="10912000" cy="420000"/>
-          </a:xfrm>
-          <a:prstGeom prst="rect">
-            <a:avLst/>
-          </a:prstGeom>
-          <a:noFill/>
-        </p:spPr>
-        <p:txBody>
-          <a:bodyPr wrap="square">
-            <a:spAutoFit/>
-          </a:bodyPr>
-          <a:lstStyle/>
-          <a:p>
-            <a:pPr>
-              <a:spcAft>
-                <a:spcPts val="630"/>
-              </a:spcAft>
-            </a:pPr>
-            <a:r>
-              <a:rPr sz="1400" b="1">
-                <a:solidFill>
-                  <a:srgbClr val="E8793A"/>
-                </a:solidFill>
-                <a:latin typeface="Nunito Sans"/>
-              </a:rPr>
-              <a:t>BLOQUE 1 · EMOCIÓN, SENTIMIENTO E IDEA</a:t>
-            </a:r>
-          </a:p>
-        </p:txBody>
-      </p:sp>
-      <p:sp>
-        <p:nvSpPr>
-          <p:cNvPr id="3" name="TextBox 2"/>
-          <p:cNvSpPr txBox="1"/>
-          <p:nvPr/>
-        </p:nvSpPr>
-        <p:spPr>
-          <a:xfrm>
-            <a:off x="640000" y="760000"/>
-            <a:ext cx="10912000" cy="800000"/>
-          </a:xfrm>
-          <a:prstGeom prst="rect">
-            <a:avLst/>
-          </a:prstGeom>
-          <a:noFill/>
-        </p:spPr>
-        <p:txBody>
-          <a:bodyPr wrap="square">
-            <a:spAutoFit/>
-          </a:bodyPr>
-          <a:lstStyle/>
-          <a:p>
-            <a:pPr>
-              <a:spcAft>
-                <a:spcPts val="1710"/>
-              </a:spcAft>
-            </a:pPr>
-            <a:r>
-              <a:rPr sz="3800" b="1">
-                <a:solidFill>
-                  <a:srgbClr val="1F2A44"/>
-                </a:solidFill>
-                <a:latin typeface="Fredoka"/>
-              </a:rPr>
-              <a:t>Cada emoción es un aviso</a:t>
-            </a:r>
-          </a:p>
-        </p:txBody>
-      </p:sp>
-      <p:graphicFrame>
-        <p:nvGraphicFramePr>
-          <p:cNvPr id="4" name="Table 3"/>
-          <p:cNvGraphicFramePr>
-            <a:graphicFrameLocks noGrp="1"/>
-          </p:cNvGraphicFramePr>
-          <p:nvPr/>
-        </p:nvGraphicFramePr>
-        <p:xfrm>
-          <a:off x="640000" y="1700000"/>
-          <a:ext cx="10912000" cy="3000000"/>
-        </p:xfrm>
-        <a:graphic>
-          <a:graphicData uri="http://schemas.openxmlformats.org/drawingml/2006/table">
-            <a:tbl>
-              <a:tblPr firstRow="1" bandRow="1">
-                <a:tableStyleId>{5C22544A-7EE6-4342-B048-85BDC9FD1C3A}</a:tableStyleId>
-              </a:tblPr>
-              <a:tblGrid>
-                <a:gridCol w="3637333"/>
-                <a:gridCol w="3637333"/>
-                <a:gridCol w="3637334"/>
-              </a:tblGrid>
-              <a:tr h="600000">
-                <a:tc>
-                  <a:txBody>
-                    <a:bodyPr/>
-                    <a:lstStyle/>
-                    <a:p>
-                      <a:r>
-                        <a:rPr sz="2000" b="1">
-                          <a:solidFill>
-                            <a:srgbClr val="FBF7EF"/>
-                          </a:solidFill>
-                          <a:latin typeface="Fredoka"/>
-                        </a:rPr>
-                        <a:t>Emoción</a:t>
-                      </a:r>
-                    </a:p>
-                  </a:txBody>
-                  <a:tcPr>
-                    <a:solidFill>
-                      <a:srgbClr val="1F2A44"/>
-                    </a:solidFill>
-                  </a:tcPr>
-                </a:tc>
-                <a:tc>
-                  <a:txBody>
-                    <a:bodyPr/>
-                    <a:lstStyle/>
-                    <a:p>
-                      <a:r>
-                        <a:rPr sz="2000" b="1">
-                          <a:solidFill>
-                            <a:srgbClr val="FBF7EF"/>
-                          </a:solidFill>
-                          <a:latin typeface="Fredoka"/>
-                        </a:rPr>
-                        <a:t>Me avisa de que…</a:t>
-                      </a:r>
-                    </a:p>
-                  </a:txBody>
-                  <a:tcPr>
-                    <a:solidFill>
-                      <a:srgbClr val="1F2A44"/>
-                    </a:solidFill>
-                  </a:tcPr>
-                </a:tc>
-                <a:tc>
-                  <a:txBody>
-                    <a:bodyPr/>
-                    <a:lstStyle/>
-                    <a:p>
-                      <a:r>
-                        <a:rPr sz="2000" b="1">
-                          <a:solidFill>
-                            <a:srgbClr val="FBF7EF"/>
-                          </a:solidFill>
-                          <a:latin typeface="Fredoka"/>
-                        </a:rPr>
-                        <a:t>Me empuja a…</a:t>
-                      </a:r>
-                    </a:p>
-                  </a:txBody>
-                  <a:tcPr>
-                    <a:solidFill>
-                      <a:srgbClr val="1F2A44"/>
-                    </a:solidFill>
-                  </a:tcPr>
-                </a:tc>
-              </a:tr>
-              <a:tr h="600000">
-                <a:tc>
-                  <a:txBody>
-                    <a:bodyPr/>
-                    <a:lstStyle/>
-                    <a:p>
-                      <a:r>
-                        <a:rPr sz="2000" b="1">
-                          <a:solidFill>
-                            <a:srgbClr val="1F2A44"/>
-                          </a:solidFill>
-                          <a:latin typeface="Nunito Sans"/>
-                        </a:rPr>
-                        <a:t>Miedo</a:t>
-                      </a:r>
-                    </a:p>
-                  </a:txBody>
-                  <a:tcPr>
-                    <a:solidFill>
-                      <a:srgbClr val="FFFFFF"/>
-                    </a:solidFill>
-                  </a:tcPr>
-                </a:tc>
-                <a:tc>
-                  <a:txBody>
-                    <a:bodyPr/>
-                    <a:lstStyle/>
-                    <a:p>
-                      <a:r>
-                        <a:rPr sz="2000" b="0">
-                          <a:solidFill>
-                            <a:srgbClr val="1F2A44"/>
-                          </a:solidFill>
-                          <a:latin typeface="Nunito Sans"/>
-                        </a:rPr>
-                        <a:t>puede haber un peligro</a:t>
-                      </a:r>
-                    </a:p>
-                  </a:txBody>
-                  <a:tcPr>
-                    <a:solidFill>
-                      <a:srgbClr val="FFFFFF"/>
-                    </a:solidFill>
-                  </a:tcPr>
-                </a:tc>
-                <a:tc>
-                  <a:txBody>
-                    <a:bodyPr/>
-                    <a:lstStyle/>
-                    <a:p>
-                      <a:r>
-                        <a:rPr sz="2000" b="0">
-                          <a:solidFill>
-                            <a:srgbClr val="1F2A44"/>
-                          </a:solidFill>
-                          <a:latin typeface="Nunito Sans"/>
-                        </a:rPr>
-                        <a:t>tener cuidado o protegerme</a:t>
-                      </a:r>
-                    </a:p>
-                  </a:txBody>
-                  <a:tcPr>
-                    <a:solidFill>
-                      <a:srgbClr val="FFFFFF"/>
-                    </a:solidFill>
-                  </a:tcPr>
-                </a:tc>
-              </a:tr>
-              <a:tr h="600000">
-                <a:tc>
-                  <a:txBody>
-                    <a:bodyPr/>
-                    <a:lstStyle/>
-                    <a:p>
-                      <a:r>
-                        <a:rPr sz="2000" b="1">
-                          <a:solidFill>
-                            <a:srgbClr val="1F2A44"/>
-                          </a:solidFill>
-                          <a:latin typeface="Nunito Sans"/>
-                        </a:rPr>
-                        <a:t>Enfado</a:t>
-                      </a:r>
-                    </a:p>
-                  </a:txBody>
-                  <a:tcPr>
-                    <a:solidFill>
-                      <a:srgbClr val="EAF0F7"/>
-                    </a:solidFill>
-                  </a:tcPr>
-                </a:tc>
-                <a:tc>
-                  <a:txBody>
-                    <a:bodyPr/>
-                    <a:lstStyle/>
-                    <a:p>
-                      <a:r>
-                        <a:rPr sz="2000" b="0">
-                          <a:solidFill>
-                            <a:srgbClr val="1F2A44"/>
-                          </a:solidFill>
-                          <a:latin typeface="Nunito Sans"/>
-                        </a:rPr>
-                        <a:t>algo me parece injusto o me bloquea</a:t>
-                      </a:r>
-                    </a:p>
-                  </a:txBody>
-                  <a:tcPr>
-                    <a:solidFill>
-                      <a:srgbClr val="EAF0F7"/>
-                    </a:solidFill>
-                  </a:tcPr>
-                </a:tc>
-                <a:tc>
-                  <a:txBody>
-                    <a:bodyPr/>
-                    <a:lstStyle/>
-                    <a:p>
-                      <a:r>
-                        <a:rPr sz="2000" b="0">
-                          <a:solidFill>
-                            <a:srgbClr val="1F2A44"/>
-                          </a:solidFill>
-                          <a:latin typeface="Nunito Sans"/>
-                        </a:rPr>
-                        <a:t>defenderme y poner límites</a:t>
-                      </a:r>
-                    </a:p>
-                  </a:txBody>
-                  <a:tcPr>
-                    <a:solidFill>
-                      <a:srgbClr val="EAF0F7"/>
-                    </a:solidFill>
-                  </a:tcPr>
-                </a:tc>
-              </a:tr>
-              <a:tr h="600000">
-                <a:tc>
-                  <a:txBody>
-                    <a:bodyPr/>
-                    <a:lstStyle/>
-                    <a:p>
-                      <a:r>
-                        <a:rPr sz="2000" b="1">
-                          <a:solidFill>
-                            <a:srgbClr val="1F2A44"/>
-                          </a:solidFill>
-                          <a:latin typeface="Nunito Sans"/>
-                        </a:rPr>
-                        <a:t>Tristeza</a:t>
-                      </a:r>
-                    </a:p>
-                  </a:txBody>
-                  <a:tcPr>
-                    <a:solidFill>
-                      <a:srgbClr val="FFFFFF"/>
-                    </a:solidFill>
-                  </a:tcPr>
-                </a:tc>
-                <a:tc>
-                  <a:txBody>
-                    <a:bodyPr/>
-                    <a:lstStyle/>
-                    <a:p>
-                      <a:r>
-                        <a:rPr sz="2000" b="0">
-                          <a:solidFill>
-                            <a:srgbClr val="1F2A44"/>
-                          </a:solidFill>
-                          <a:latin typeface="Nunito Sans"/>
-                        </a:rPr>
-                        <a:t>he perdido algo que me importa</a:t>
-                      </a:r>
-                    </a:p>
-                  </a:txBody>
-                  <a:tcPr>
-                    <a:solidFill>
-                      <a:srgbClr val="FFFFFF"/>
-                    </a:solidFill>
-                  </a:tcPr>
-                </a:tc>
-                <a:tc>
-                  <a:txBody>
-                    <a:bodyPr/>
-                    <a:lstStyle/>
-                    <a:p>
-                      <a:r>
-                        <a:rPr sz="2000" b="0">
-                          <a:solidFill>
-                            <a:srgbClr val="1F2A44"/>
-                          </a:solidFill>
-                          <a:latin typeface="Nunito Sans"/>
-                        </a:rPr>
-                        <a:t>parar y buscar apoyo</a:t>
-                      </a:r>
-                    </a:p>
-                  </a:txBody>
-                  <a:tcPr>
-                    <a:solidFill>
-                      <a:srgbClr val="FFFFFF"/>
-                    </a:solidFill>
-                  </a:tcPr>
-                </a:tc>
-              </a:tr>
-              <a:tr h="600000">
-                <a:tc>
-                  <a:txBody>
-                    <a:bodyPr/>
-                    <a:lstStyle/>
-                    <a:p>
-                      <a:r>
-                        <a:rPr sz="2000" b="1">
-                          <a:solidFill>
-                            <a:srgbClr val="1F2A44"/>
-                          </a:solidFill>
-                          <a:latin typeface="Nunito Sans"/>
-                        </a:rPr>
-                        <a:t>Alegría</a:t>
-                      </a:r>
-                    </a:p>
-                  </a:txBody>
-                  <a:tcPr>
-                    <a:solidFill>
-                      <a:srgbClr val="EAF0F7"/>
-                    </a:solidFill>
-                  </a:tcPr>
-                </a:tc>
-                <a:tc>
-                  <a:txBody>
-                    <a:bodyPr/>
-                    <a:lstStyle/>
-                    <a:p>
-                      <a:r>
-                        <a:rPr sz="2000" b="0">
-                          <a:solidFill>
-                            <a:srgbClr val="1F2A44"/>
-                          </a:solidFill>
-                          <a:latin typeface="Nunito Sans"/>
-                        </a:rPr>
-                        <a:t>algo me va bien</a:t>
-                      </a:r>
-                    </a:p>
-                  </a:txBody>
-                  <a:tcPr>
-                    <a:solidFill>
-                      <a:srgbClr val="EAF0F7"/>
-                    </a:solidFill>
-                  </a:tcPr>
-                </a:tc>
-                <a:tc>
-                  <a:txBody>
-                    <a:bodyPr/>
-                    <a:lstStyle/>
-                    <a:p>
-                      <a:r>
-                        <a:rPr sz="2000" b="0">
-                          <a:solidFill>
-                            <a:srgbClr val="1F2A44"/>
-                          </a:solidFill>
-                          <a:latin typeface="Nunito Sans"/>
-                        </a:rPr>
-                        <a:t>repetirlo y acercarme a otros</a:t>
-                      </a:r>
-                    </a:p>
-                  </a:txBody>
-                  <a:tcPr>
-                    <a:solidFill>
-                      <a:srgbClr val="EAF0F7"/>
                     </a:solidFill>
                   </a:tcPr>
                 </a:tc>
@@ -8023,7 +7465,7 @@
                 </a:solidFill>
                 <a:latin typeface="Nunito Sans"/>
               </a:rPr>
-              <a:t>BLOQUE 1 · EMOCIÓN, SENTIMIENTO E IDEA</a:t>
+              <a:t>BLOQUE 1 · TRES TIPOS DE AMISTAD</a:t>
             </a:r>
           </a:p>
         </p:txBody>
@@ -8062,64 +7504,21 @@
                 </a:solidFill>
                 <a:latin typeface="Fredoka"/>
               </a:rPr>
-              <a:t>Las emociones informan, no mandan</a:t>
-            </a:r>
-          </a:p>
-        </p:txBody>
-      </p:sp>
-      <p:sp>
-        <p:nvSpPr>
-          <p:cNvPr id="4" name="Rectangle 3"/>
-          <p:cNvSpPr/>
-          <p:nvPr/>
-        </p:nvSpPr>
-        <p:spPr>
-          <a:xfrm>
-            <a:off x="640000" y="1650000"/>
-            <a:ext cx="5306000" cy="4400000"/>
-          </a:xfrm>
-          <a:prstGeom prst="rect">
-            <a:avLst/>
-          </a:prstGeom>
-          <a:solidFill>
-            <a:srgbClr val="FBE3D2"/>
-          </a:solidFill>
-          <a:ln>
-            <a:noFill/>
-          </a:ln>
-        </p:spPr>
-        <p:style>
-          <a:lnRef idx="1">
-            <a:schemeClr val="accent1"/>
-          </a:lnRef>
-          <a:fillRef idx="3">
-            <a:schemeClr val="accent1"/>
-          </a:fillRef>
-          <a:effectRef idx="2">
-            <a:schemeClr val="accent1"/>
-          </a:effectRef>
-          <a:fontRef idx="minor">
-            <a:schemeClr val="lt1"/>
-          </a:fontRef>
-        </p:style>
-        <p:txBody>
-          <a:bodyPr rtlCol="0" anchor="ctr"/>
-          <a:lstStyle/>
-          <a:p>
-            <a:pPr algn="ctr"/>
-          </a:p>
-        </p:txBody>
-      </p:sp>
-      <p:sp>
-        <p:nvSpPr>
-          <p:cNvPr id="5" name="TextBox 4"/>
+              <a:t>Lo que añade Aristóteles</a:t>
+            </a:r>
+          </a:p>
+        </p:txBody>
+      </p:sp>
+      <p:sp>
+        <p:nvSpPr>
+          <p:cNvPr id="4" name="TextBox 3"/>
           <p:cNvSpPr txBox="1"/>
           <p:nvPr/>
         </p:nvSpPr>
         <p:spPr>
           <a:xfrm>
-            <a:off x="840000" y="1750000"/>
-            <a:ext cx="4906000" cy="600000"/>
+            <a:off x="640000" y="1650000"/>
+            <a:ext cx="10912000" cy="4808000"/>
           </a:xfrm>
           <a:prstGeom prst="rect">
             <a:avLst/>
@@ -8140,45 +7539,6 @@
             <a:r>
               <a:rPr sz="2800" b="1">
                 <a:solidFill>
-                  <a:srgbClr val="C2531C"/>
-                </a:solidFill>
-                <a:latin typeface="Nunito Sans"/>
-              </a:rPr>
-              <a:t>No son</a:t>
-            </a:r>
-          </a:p>
-        </p:txBody>
-      </p:sp>
-      <p:sp>
-        <p:nvSpPr>
-          <p:cNvPr id="6" name="TextBox 5"/>
-          <p:cNvSpPr txBox="1"/>
-          <p:nvPr/>
-        </p:nvSpPr>
-        <p:spPr>
-          <a:xfrm>
-            <a:off x="840000" y="2400000"/>
-            <a:ext cx="4906000" cy="3500000"/>
-          </a:xfrm>
-          <a:prstGeom prst="rect">
-            <a:avLst/>
-          </a:prstGeom>
-          <a:noFill/>
-        </p:spPr>
-        <p:txBody>
-          <a:bodyPr wrap="square">
-            <a:spAutoFit/>
-          </a:bodyPr>
-          <a:lstStyle/>
-          <a:p>
-            <a:pPr>
-              <a:spcAft>
-                <a:spcPts val="1170"/>
-              </a:spcAft>
-            </a:pPr>
-            <a:r>
-              <a:rPr sz="2600" b="1">
-                <a:solidFill>
                   <a:srgbClr val="E8793A"/>
                 </a:solidFill>
                 <a:latin typeface="Nunito Sans"/>
@@ -8186,131 +7546,33 @@
               <a:t>• </a:t>
             </a:r>
             <a:r>
-              <a:rPr sz="2600" b="0">
+              <a:rPr sz="2800" b="0">
                 <a:solidFill>
                   <a:srgbClr val="1F2A44"/>
                 </a:solidFill>
                 <a:latin typeface="Nunito Sans"/>
               </a:rPr>
-              <a:t>Buenas o malas</a:t>
-            </a:r>
-          </a:p>
-          <a:p>
-            <a:pPr>
-              <a:spcAft>
-                <a:spcPts val="1170"/>
-              </a:spcAft>
-            </a:pPr>
-            <a:r>
-              <a:rPr sz="2600" b="1">
-                <a:solidFill>
-                  <a:srgbClr val="E8793A"/>
-                </a:solidFill>
-                <a:latin typeface="Nunito Sans"/>
-              </a:rPr>
-              <a:t>• </a:t>
-            </a:r>
-            <a:r>
-              <a:rPr sz="2600" b="0">
+              <a:t>Las amistades por utilidad y por placer </a:t>
+            </a:r>
+            <a:r>
+              <a:rPr sz="2800" b="1">
                 <a:solidFill>
                   <a:srgbClr val="1F2A44"/>
                 </a:solidFill>
                 <a:latin typeface="Nunito Sans"/>
               </a:rPr>
-              <a:t>Órdenes que hay que obedecer</a:t>
-            </a:r>
-          </a:p>
-          <a:p>
-            <a:pPr>
-              <a:spcAft>
-                <a:spcPts val="1170"/>
-              </a:spcAft>
-            </a:pPr>
-            <a:r>
-              <a:rPr sz="2600" b="1">
-                <a:solidFill>
-                  <a:srgbClr val="E8793A"/>
-                </a:solidFill>
-                <a:latin typeface="Nunito Sans"/>
-              </a:rPr>
-              <a:t>• </a:t>
-            </a:r>
-            <a:r>
-              <a:rPr sz="2600" b="0">
+              <a:t>no son falsas</a:t>
+            </a:r>
+            <a:r>
+              <a:rPr sz="2800" b="0">
                 <a:solidFill>
                   <a:srgbClr val="1F2A44"/>
                 </a:solidFill>
                 <a:latin typeface="Nunito Sans"/>
               </a:rPr>
-              <a:t>Siempre verdad</a:t>
-            </a:r>
-          </a:p>
-        </p:txBody>
-      </p:sp>
-      <p:sp>
-        <p:nvSpPr>
-          <p:cNvPr id="7" name="Rectangle 6"/>
-          <p:cNvSpPr/>
-          <p:nvPr/>
-        </p:nvSpPr>
-        <p:spPr>
-          <a:xfrm>
-            <a:off x="6246000" y="1650000"/>
-            <a:ext cx="5306000" cy="4400000"/>
-          </a:xfrm>
-          <a:prstGeom prst="rect">
-            <a:avLst/>
-          </a:prstGeom>
-          <a:solidFill>
-            <a:srgbClr val="EAF0F7"/>
-          </a:solidFill>
-          <a:ln>
-            <a:noFill/>
-          </a:ln>
-        </p:spPr>
-        <p:style>
-          <a:lnRef idx="1">
-            <a:schemeClr val="accent1"/>
-          </a:lnRef>
-          <a:fillRef idx="3">
-            <a:schemeClr val="accent1"/>
-          </a:fillRef>
-          <a:effectRef idx="2">
-            <a:schemeClr val="accent1"/>
-          </a:effectRef>
-          <a:fontRef idx="minor">
-            <a:schemeClr val="lt1"/>
-          </a:fontRef>
-        </p:style>
-        <p:txBody>
-          <a:bodyPr rtlCol="0" anchor="ctr"/>
-          <a:lstStyle/>
-          <a:p>
-            <a:pPr algn="ctr"/>
-          </a:p>
-        </p:txBody>
-      </p:sp>
-      <p:sp>
-        <p:nvSpPr>
-          <p:cNvPr id="8" name="TextBox 7"/>
-          <p:cNvSpPr txBox="1"/>
-          <p:nvPr/>
-        </p:nvSpPr>
-        <p:spPr>
-          <a:xfrm>
-            <a:off x="6446000" y="1750000"/>
-            <a:ext cx="4906000" cy="600000"/>
-          </a:xfrm>
-          <a:prstGeom prst="rect">
-            <a:avLst/>
-          </a:prstGeom>
-          <a:noFill/>
-        </p:spPr>
-        <p:txBody>
-          <a:bodyPr wrap="square">
-            <a:spAutoFit/>
-          </a:bodyPr>
-          <a:lstStyle/>
+              <a:t>: son más frágiles</a:t>
+            </a:r>
+          </a:p>
           <a:p>
             <a:pPr>
               <a:spcAft>
@@ -8320,44 +7582,48 @@
             <a:r>
               <a:rPr sz="2800" b="1">
                 <a:solidFill>
-                  <a:srgbClr val="2F6FB5"/>
-                </a:solidFill>
-                <a:latin typeface="Nunito Sans"/>
-              </a:rPr>
-              <a:t>Sí son</a:t>
-            </a:r>
-          </a:p>
-        </p:txBody>
-      </p:sp>
-      <p:sp>
-        <p:nvSpPr>
-          <p:cNvPr id="9" name="TextBox 8"/>
-          <p:cNvSpPr txBox="1"/>
-          <p:nvPr/>
-        </p:nvSpPr>
-        <p:spPr>
-          <a:xfrm>
-            <a:off x="6446000" y="2400000"/>
-            <a:ext cx="4906000" cy="3500000"/>
-          </a:xfrm>
-          <a:prstGeom prst="rect">
-            <a:avLst/>
-          </a:prstGeom>
-          <a:noFill/>
-        </p:spPr>
-        <p:txBody>
-          <a:bodyPr wrap="square">
-            <a:spAutoFit/>
-          </a:bodyPr>
-          <a:lstStyle/>
+                  <a:srgbClr val="E8793A"/>
+                </a:solidFill>
+                <a:latin typeface="Nunito Sans"/>
+              </a:rPr>
+              <a:t>• </a:t>
+            </a:r>
+            <a:r>
+              <a:rPr sz="2800" b="0">
+                <a:solidFill>
+                  <a:srgbClr val="1F2A44"/>
+                </a:solidFill>
+                <a:latin typeface="Nunito Sans"/>
+              </a:rPr>
+              <a:t>Según él, los jóvenes suelen hacer amistades por </a:t>
+            </a:r>
+            <a:r>
+              <a:rPr sz="2800" b="1">
+                <a:solidFill>
+                  <a:srgbClr val="1F2A44"/>
+                </a:solidFill>
+                <a:latin typeface="Nunito Sans"/>
+              </a:rPr>
+              <a:t>placer</a:t>
+            </a:r>
+            <a:r>
+              <a:rPr sz="2800" b="0">
+                <a:solidFill>
+                  <a:srgbClr val="1F2A44"/>
+                </a:solidFill>
+                <a:latin typeface="Nunito Sans"/>
+              </a:rPr>
+              <a:t>, y cambian a menudo</a:t>
+            </a:r>
+          </a:p>
           <a:p>
             <a:pPr>
               <a:spcAft>
-                <a:spcPts val="1170"/>
+                <a:spcPts val="1260"/>
               </a:spcAft>
             </a:pPr>
             <a:r>
-              <a:rPr sz="2600" b="1">
+              <a:rPr sz="2800" b="1">
                 <a:solidFill>
                   <a:srgbClr val="E8793A"/>
                 </a:solidFill>
@@ -8366,23 +7632,41 @@
               <a:t>• </a:t>
             </a:r>
             <a:r>
-              <a:rPr sz="2600" b="0">
+              <a:rPr sz="2800" b="0">
                 <a:solidFill>
                   <a:srgbClr val="1F2A44"/>
                 </a:solidFill>
                 <a:latin typeface="Nunito Sans"/>
               </a:rPr>
-              <a:t>Agradables o desagradables</a:t>
+              <a:t>La amistad por </a:t>
+            </a:r>
+            <a:r>
+              <a:rPr sz="2800" b="1">
+                <a:solidFill>
+                  <a:srgbClr val="1F2A44"/>
+                </a:solidFill>
+                <a:latin typeface="Nunito Sans"/>
+              </a:rPr>
+              <a:t>virtud</a:t>
+            </a:r>
+            <a:r>
+              <a:rPr sz="2800" b="0">
+                <a:solidFill>
+                  <a:srgbClr val="1F2A44"/>
+                </a:solidFill>
+                <a:latin typeface="Nunito Sans"/>
+              </a:rPr>
+              <a:t> también es útil y agradable, pero no depende de eso</a:t>
             </a:r>
           </a:p>
           <a:p>
             <a:pPr>
               <a:spcAft>
-                <a:spcPts val="1170"/>
+                <a:spcPts val="1260"/>
               </a:spcAft>
             </a:pPr>
             <a:r>
-              <a:rPr sz="2600" b="1">
+              <a:rPr sz="2800" b="1">
                 <a:solidFill>
                   <a:srgbClr val="E8793A"/>
                 </a:solidFill>
@@ -8391,56 +7675,31 @@
               <a:t>• </a:t>
             </a:r>
             <a:r>
-              <a:rPr sz="2600" b="0">
+              <a:rPr sz="2800" b="0">
                 <a:solidFill>
                   <a:srgbClr val="1F2A44"/>
                 </a:solidFill>
                 <a:latin typeface="Nunito Sans"/>
               </a:rPr>
-              <a:t>Señales que </a:t>
-            </a:r>
-            <a:r>
-              <a:rPr sz="2600" b="1">
+              <a:t>Necesita </a:t>
+            </a:r>
+            <a:r>
+              <a:rPr sz="2800" b="1">
                 <a:solidFill>
                   <a:srgbClr val="1F2A44"/>
                 </a:solidFill>
                 <a:latin typeface="Nunito Sans"/>
               </a:rPr>
-              <a:t>informan</a:t>
-            </a:r>
-            <a:r>
-              <a:rPr sz="2600" b="0">
+              <a:t>tiempo</a:t>
+            </a:r>
+            <a:r>
+              <a:rPr sz="2800" b="0">
                 <a:solidFill>
                   <a:srgbClr val="1F2A44"/>
                 </a:solidFill>
                 <a:latin typeface="Nunito Sans"/>
               </a:rPr>
-              <a:t> de lo que me importa</a:t>
-            </a:r>
-          </a:p>
-          <a:p>
-            <a:pPr>
-              <a:spcAft>
-                <a:spcPts val="1170"/>
-              </a:spcAft>
-            </a:pPr>
-            <a:r>
-              <a:rPr sz="2600" b="1">
-                <a:solidFill>
-                  <a:srgbClr val="E8793A"/>
-                </a:solidFill>
-                <a:latin typeface="Nunito Sans"/>
-              </a:rPr>
-              <a:t>• </a:t>
-            </a:r>
-            <a:r>
-              <a:rPr sz="2600" b="0">
-                <a:solidFill>
-                  <a:srgbClr val="1F2A44"/>
-                </a:solidFill>
-                <a:latin typeface="Nunito Sans"/>
-              </a:rPr>
-              <a:t>Una pista que hay que comprobar: «¿cómo lo sé?»</a:t>
+              <a:t> y trato: no se hace en una semana</a:t>
             </a:r>
           </a:p>
         </p:txBody>
